--- a/final presentation.pptx
+++ b/final presentation.pptx
@@ -5,10 +5,10 @@
     <p:sldMasterId id="2147483672" r:id="rId1"/>
   </p:sldMasterIdLst>
   <p:notesMasterIdLst>
-    <p:notesMasterId r:id="rId11"/>
+    <p:notesMasterId r:id="rId13"/>
   </p:notesMasterIdLst>
   <p:handoutMasterIdLst>
-    <p:handoutMasterId r:id="rId12"/>
+    <p:handoutMasterId r:id="rId14"/>
   </p:handoutMasterIdLst>
   <p:sldIdLst>
     <p:sldId id="408" r:id="rId2"/>
@@ -19,7 +19,9 @@
     <p:sldId id="2227" r:id="rId7"/>
     <p:sldId id="2150" r:id="rId8"/>
     <p:sldId id="2228" r:id="rId9"/>
-    <p:sldId id="2217" r:id="rId10"/>
+    <p:sldId id="2229" r:id="rId10"/>
+    <p:sldId id="2230" r:id="rId11"/>
+    <p:sldId id="2217" r:id="rId12"/>
   </p:sldIdLst>
   <p:sldSz cx="12192000" cy="6858000"/>
   <p:notesSz cx="6858000" cy="9144000"/>
@@ -124,8 +126,8 @@
 <file path=ppt/revisionInfo.xml><?xml version="1.0" encoding="utf-8"?>
 <p1510:revInfo xmlns:a="http://schemas.openxmlformats.org/drawingml/2006/main" xmlns:r="http://schemas.openxmlformats.org/officeDocument/2006/relationships" xmlns:p1510="http://schemas.microsoft.com/office/powerpoint/2015/10/main">
   <p1510:revLst>
-    <p1510:client id="{2F611B2A-9C1F-4244-8FA5-B80D59149FC8}" v="1" dt="2026-04-26T09:29:05.185"/>
-    <p1510:client id="{C65F9CEA-CD29-45BF-BCF2-FB8AF89525A5}" v="202" dt="2026-04-26T22:55:00.771"/>
+    <p1510:client id="{5F3F4812-DE4C-4F8C-A54B-DCBDF3A08509}" v="75" dt="2026-04-27T20:38:51.841"/>
+    <p1510:client id="{C65F9CEA-CD29-45BF-BCF2-FB8AF89525A5}" v="214" dt="2026-04-27T20:14:52.930"/>
     <p1510:client id="{E0C367A5-A87D-4142-B311-4804C098E2C7}" v="115" dt="2026-04-26T23:01:14.476"/>
   </p1510:revLst>
 </p1510:revInfo>
@@ -133,6 +135,77 @@
 
 <file path=ppt/changesInfos/changesInfo1.xml><?xml version="1.0" encoding="utf-8"?>
 <pc:chgInfo xmlns:a="http://schemas.openxmlformats.org/drawingml/2006/main" xmlns:r="http://schemas.openxmlformats.org/officeDocument/2006/relationships" xmlns:ac="http://schemas.microsoft.com/office/drawing/2013/main/command" xmlns:pc="http://schemas.microsoft.com/office/powerpoint/2013/main/command">
+  <pc:docChgLst>
+    <pc:chgData name="Elizalde, Sergio" userId="0f7c9ba4-51fe-43ab-9ac1-6d642c4cebdf" providerId="ADAL" clId="{194C2CC1-D3CF-4B6A-870E-C4FF3DB3998F}"/>
+    <pc:docChg chg="custSel addSld modSld">
+      <pc:chgData name="Elizalde, Sergio" userId="0f7c9ba4-51fe-43ab-9ac1-6d642c4cebdf" providerId="ADAL" clId="{194C2CC1-D3CF-4B6A-870E-C4FF3DB3998F}" dt="2026-04-27T20:38:51.841" v="178" actId="1076"/>
+      <pc:docMkLst>
+        <pc:docMk/>
+      </pc:docMkLst>
+      <pc:sldChg chg="modSp mod">
+        <pc:chgData name="Elizalde, Sergio" userId="0f7c9ba4-51fe-43ab-9ac1-6d642c4cebdf" providerId="ADAL" clId="{194C2CC1-D3CF-4B6A-870E-C4FF3DB3998F}" dt="2026-04-27T20:24:30.568" v="103" actId="20577"/>
+        <pc:sldMkLst>
+          <pc:docMk/>
+          <pc:sldMk cId="3480351626" sldId="2217"/>
+        </pc:sldMkLst>
+        <pc:spChg chg="mod">
+          <ac:chgData name="Elizalde, Sergio" userId="0f7c9ba4-51fe-43ab-9ac1-6d642c4cebdf" providerId="ADAL" clId="{194C2CC1-D3CF-4B6A-870E-C4FF3DB3998F}" dt="2026-04-27T20:24:30.568" v="103" actId="20577"/>
+          <ac:spMkLst>
+            <pc:docMk/>
+            <pc:sldMk cId="3480351626" sldId="2217"/>
+            <ac:spMk id="3" creationId="{4BC348B2-A502-4478-977C-9683494609FC}"/>
+          </ac:spMkLst>
+        </pc:spChg>
+      </pc:sldChg>
+      <pc:sldChg chg="addSp delSp modSp add mod">
+        <pc:chgData name="Elizalde, Sergio" userId="0f7c9ba4-51fe-43ab-9ac1-6d642c4cebdf" providerId="ADAL" clId="{194C2CC1-D3CF-4B6A-870E-C4FF3DB3998F}" dt="2026-04-27T20:38:51.841" v="178" actId="1076"/>
+        <pc:sldMkLst>
+          <pc:docMk/>
+          <pc:sldMk cId="1797784792" sldId="2230"/>
+        </pc:sldMkLst>
+        <pc:spChg chg="mod">
+          <ac:chgData name="Elizalde, Sergio" userId="0f7c9ba4-51fe-43ab-9ac1-6d642c4cebdf" providerId="ADAL" clId="{194C2CC1-D3CF-4B6A-870E-C4FF3DB3998F}" dt="2026-04-27T20:38:13.044" v="131" actId="20577"/>
+          <ac:spMkLst>
+            <pc:docMk/>
+            <pc:sldMk cId="1797784792" sldId="2230"/>
+            <ac:spMk id="2" creationId="{49F1587F-9CC6-D8CB-E2AB-9BF0A73E3DBF}"/>
+          </ac:spMkLst>
+        </pc:spChg>
+        <pc:spChg chg="mod">
+          <ac:chgData name="Elizalde, Sergio" userId="0f7c9ba4-51fe-43ab-9ac1-6d642c4cebdf" providerId="ADAL" clId="{194C2CC1-D3CF-4B6A-870E-C4FF3DB3998F}" dt="2026-04-27T20:38:37.061" v="172" actId="20577"/>
+          <ac:spMkLst>
+            <pc:docMk/>
+            <pc:sldMk cId="1797784792" sldId="2230"/>
+            <ac:spMk id="14" creationId="{0AF9BA4E-F6D3-1AFF-AC68-0B490DEE53E6}"/>
+          </ac:spMkLst>
+        </pc:spChg>
+        <pc:picChg chg="add mod">
+          <ac:chgData name="Elizalde, Sergio" userId="0f7c9ba4-51fe-43ab-9ac1-6d642c4cebdf" providerId="ADAL" clId="{194C2CC1-D3CF-4B6A-870E-C4FF3DB3998F}" dt="2026-04-27T20:38:51.841" v="178" actId="1076"/>
+          <ac:picMkLst>
+            <pc:docMk/>
+            <pc:sldMk cId="1797784792" sldId="2230"/>
+            <ac:picMk id="4" creationId="{5570FBA1-30A0-3E40-9A07-ED96CC118166}"/>
+          </ac:picMkLst>
+        </pc:picChg>
+        <pc:picChg chg="del">
+          <ac:chgData name="Elizalde, Sergio" userId="0f7c9ba4-51fe-43ab-9ac1-6d642c4cebdf" providerId="ADAL" clId="{194C2CC1-D3CF-4B6A-870E-C4FF3DB3998F}" dt="2026-04-27T20:38:43.738" v="174" actId="478"/>
+          <ac:picMkLst>
+            <pc:docMk/>
+            <pc:sldMk cId="1797784792" sldId="2230"/>
+            <ac:picMk id="6" creationId="{4E872221-0FE3-9E2F-D67D-DCB836C18E7A}"/>
+          </ac:picMkLst>
+        </pc:picChg>
+        <pc:picChg chg="del">
+          <ac:chgData name="Elizalde, Sergio" userId="0f7c9ba4-51fe-43ab-9ac1-6d642c4cebdf" providerId="ADAL" clId="{194C2CC1-D3CF-4B6A-870E-C4FF3DB3998F}" dt="2026-04-27T20:38:42.491" v="173" actId="478"/>
+          <ac:picMkLst>
+            <pc:docMk/>
+            <pc:sldMk cId="1797784792" sldId="2230"/>
+            <ac:picMk id="11" creationId="{1419C1DB-767D-1290-B313-322672617367}"/>
+          </ac:picMkLst>
+        </pc:picChg>
+      </pc:sldChg>
+    </pc:docChg>
+  </pc:docChgLst>
   <pc:docChgLst>
     <pc:chgData name="Elizalde, Sergio" userId="0f7c9ba4-51fe-43ab-9ac1-6d642c4cebdf" providerId="ADAL" clId="{2F611B2A-9C1F-4244-8FA5-B80D59149FC8}"/>
     <pc:docChg chg="undo custSel modSld">
@@ -664,19 +737,19 @@
   </pc:docChgLst>
   <pc:docChgLst>
     <pc:chgData name="Elizalde, Sergio" userId="0f7c9ba4-51fe-43ab-9ac1-6d642c4cebdf" providerId="ADAL" clId="{0E5839DB-E1D4-495F-B2BC-A8FC450CA4BC}"/>
-    <pc:docChg chg="custSel modSld">
-      <pc:chgData name="Elizalde, Sergio" userId="0f7c9ba4-51fe-43ab-9ac1-6d642c4cebdf" providerId="ADAL" clId="{0E5839DB-E1D4-495F-B2BC-A8FC450CA4BC}" dt="2026-04-26T22:55:00.771" v="201" actId="6549"/>
+    <pc:docChg chg="custSel addSld modSld">
+      <pc:chgData name="Elizalde, Sergio" userId="0f7c9ba4-51fe-43ab-9ac1-6d642c4cebdf" providerId="ADAL" clId="{0E5839DB-E1D4-495F-B2BC-A8FC450CA4BC}" dt="2026-04-27T20:15:33.176" v="471" actId="1076"/>
       <pc:docMkLst>
         <pc:docMk/>
       </pc:docMkLst>
       <pc:sldChg chg="addSp modSp mod modNotesTx">
-        <pc:chgData name="Elizalde, Sergio" userId="0f7c9ba4-51fe-43ab-9ac1-6d642c4cebdf" providerId="ADAL" clId="{0E5839DB-E1D4-495F-B2BC-A8FC450CA4BC}" dt="2026-04-26T22:53:37.293" v="154" actId="1076"/>
+        <pc:chgData name="Elizalde, Sergio" userId="0f7c9ba4-51fe-43ab-9ac1-6d642c4cebdf" providerId="ADAL" clId="{0E5839DB-E1D4-495F-B2BC-A8FC450CA4BC}" dt="2026-04-27T19:28:27.793" v="226" actId="1076"/>
         <pc:sldMkLst>
           <pc:docMk/>
           <pc:sldMk cId="26606762" sldId="2150"/>
         </pc:sldMkLst>
         <pc:spChg chg="mod">
-          <ac:chgData name="Elizalde, Sergio" userId="0f7c9ba4-51fe-43ab-9ac1-6d642c4cebdf" providerId="ADAL" clId="{0E5839DB-E1D4-495F-B2BC-A8FC450CA4BC}" dt="2026-04-26T22:53:37.293" v="154" actId="1076"/>
+          <ac:chgData name="Elizalde, Sergio" userId="0f7c9ba4-51fe-43ab-9ac1-6d642c4cebdf" providerId="ADAL" clId="{0E5839DB-E1D4-495F-B2BC-A8FC450CA4BC}" dt="2026-04-27T19:28:26.466" v="225" actId="5793"/>
           <ac:spMkLst>
             <pc:docMk/>
             <pc:sldMk cId="26606762" sldId="2150"/>
@@ -700,7 +773,7 @@
           </ac:picMkLst>
         </pc:picChg>
         <pc:picChg chg="mod">
-          <ac:chgData name="Elizalde, Sergio" userId="0f7c9ba4-51fe-43ab-9ac1-6d642c4cebdf" providerId="ADAL" clId="{0E5839DB-E1D4-495F-B2BC-A8FC450CA4BC}" dt="2026-04-26T22:34:12.086" v="43" actId="1076"/>
+          <ac:chgData name="Elizalde, Sergio" userId="0f7c9ba4-51fe-43ab-9ac1-6d642c4cebdf" providerId="ADAL" clId="{0E5839DB-E1D4-495F-B2BC-A8FC450CA4BC}" dt="2026-04-27T19:28:27.793" v="226" actId="1076"/>
           <ac:picMkLst>
             <pc:docMk/>
             <pc:sldMk cId="26606762" sldId="2150"/>
@@ -732,7 +805,7 @@
         </pc:spChg>
       </pc:sldChg>
       <pc:sldChg chg="addSp delSp modSp mod delAnim modNotesTx">
-        <pc:chgData name="Elizalde, Sergio" userId="0f7c9ba4-51fe-43ab-9ac1-6d642c4cebdf" providerId="ADAL" clId="{0E5839DB-E1D4-495F-B2BC-A8FC450CA4BC}" dt="2026-04-26T22:55:00.771" v="201" actId="6549"/>
+        <pc:chgData name="Elizalde, Sergio" userId="0f7c9ba4-51fe-43ab-9ac1-6d642c4cebdf" providerId="ADAL" clId="{0E5839DB-E1D4-495F-B2BC-A8FC450CA4BC}" dt="2026-04-27T20:06:42.460" v="416" actId="20577"/>
         <pc:sldMkLst>
           <pc:docMk/>
           <pc:sldMk cId="4150253111" sldId="2227"/>
@@ -746,7 +819,7 @@
           </ac:spMkLst>
         </pc:spChg>
         <pc:spChg chg="mod">
-          <ac:chgData name="Elizalde, Sergio" userId="0f7c9ba4-51fe-43ab-9ac1-6d642c4cebdf" providerId="ADAL" clId="{0E5839DB-E1D4-495F-B2BC-A8FC450CA4BC}" dt="2026-04-26T22:54:57.556" v="200" actId="14100"/>
+          <ac:chgData name="Elizalde, Sergio" userId="0f7c9ba4-51fe-43ab-9ac1-6d642c4cebdf" providerId="ADAL" clId="{0E5839DB-E1D4-495F-B2BC-A8FC450CA4BC}" dt="2026-04-27T20:06:42.460" v="416" actId="20577"/>
           <ac:spMkLst>
             <pc:docMk/>
             <pc:sldMk cId="4150253111" sldId="2227"/>
@@ -777,6 +850,14 @@
             <ac:grpSpMk id="8" creationId="{E4287383-552D-9D3A-4257-A5736488EA54}"/>
           </ac:grpSpMkLst>
         </pc:grpChg>
+        <pc:picChg chg="add mod">
+          <ac:chgData name="Elizalde, Sergio" userId="0f7c9ba4-51fe-43ab-9ac1-6d642c4cebdf" providerId="ADAL" clId="{0E5839DB-E1D4-495F-B2BC-A8FC450CA4BC}" dt="2026-04-27T19:27:40.298" v="206" actId="1076"/>
+          <ac:picMkLst>
+            <pc:docMk/>
+            <pc:sldMk cId="4150253111" sldId="2227"/>
+            <ac:picMk id="4" creationId="{E5D2EF0C-5BB5-0472-A260-72CF75625625}"/>
+          </ac:picMkLst>
+        </pc:picChg>
         <pc:picChg chg="add del mod">
           <ac:chgData name="Elizalde, Sergio" userId="0f7c9ba4-51fe-43ab-9ac1-6d642c4cebdf" providerId="ADAL" clId="{0E5839DB-E1D4-495F-B2BC-A8FC450CA4BC}" dt="2026-04-26T22:32:52.351" v="13" actId="478"/>
           <ac:picMkLst>
@@ -794,7 +875,7 @@
           </ac:picMkLst>
         </pc:picChg>
         <pc:picChg chg="add mod modCrop">
-          <ac:chgData name="Elizalde, Sergio" userId="0f7c9ba4-51fe-43ab-9ac1-6d642c4cebdf" providerId="ADAL" clId="{0E5839DB-E1D4-495F-B2BC-A8FC450CA4BC}" dt="2026-04-26T22:54:47.019" v="199" actId="1035"/>
+          <ac:chgData name="Elizalde, Sergio" userId="0f7c9ba4-51fe-43ab-9ac1-6d642c4cebdf" providerId="ADAL" clId="{0E5839DB-E1D4-495F-B2BC-A8FC450CA4BC}" dt="2026-04-27T19:27:36.689" v="204" actId="1076"/>
           <ac:picMkLst>
             <pc:docMk/>
             <pc:sldMk cId="4150253111" sldId="2227"/>
@@ -810,36 +891,99 @@
           </ac:cxnSpMkLst>
         </pc:cxnChg>
       </pc:sldChg>
-      <pc:sldChg chg="modSp mod modNotesTx">
-        <pc:chgData name="Elizalde, Sergio" userId="0f7c9ba4-51fe-43ab-9ac1-6d642c4cebdf" providerId="ADAL" clId="{0E5839DB-E1D4-495F-B2BC-A8FC450CA4BC}" dt="2026-04-26T22:52:41.121" v="143" actId="20577"/>
+      <pc:sldChg chg="addSp delSp modSp mod modNotesTx">
+        <pc:chgData name="Elizalde, Sergio" userId="0f7c9ba4-51fe-43ab-9ac1-6d642c4cebdf" providerId="ADAL" clId="{0E5839DB-E1D4-495F-B2BC-A8FC450CA4BC}" dt="2026-04-27T20:15:33.176" v="471" actId="1076"/>
         <pc:sldMkLst>
           <pc:docMk/>
           <pc:sldMk cId="2404323729" sldId="2228"/>
         </pc:sldMkLst>
+        <pc:spChg chg="add">
+          <ac:chgData name="Elizalde, Sergio" userId="0f7c9ba4-51fe-43ab-9ac1-6d642c4cebdf" providerId="ADAL" clId="{0E5839DB-E1D4-495F-B2BC-A8FC450CA4BC}" dt="2026-04-27T20:11:15.794" v="424"/>
+          <ac:spMkLst>
+            <pc:docMk/>
+            <pc:sldMk cId="2404323729" sldId="2228"/>
+            <ac:spMk id="3" creationId="{3DCE2CBA-0520-668F-C73F-6588E23120AB}"/>
+          </ac:spMkLst>
+        </pc:spChg>
+        <pc:spChg chg="add del mod">
+          <ac:chgData name="Elizalde, Sergio" userId="0f7c9ba4-51fe-43ab-9ac1-6d642c4cebdf" providerId="ADAL" clId="{0E5839DB-E1D4-495F-B2BC-A8FC450CA4BC}" dt="2026-04-27T20:11:24.351" v="427" actId="478"/>
+          <ac:spMkLst>
+            <pc:docMk/>
+            <pc:sldMk cId="2404323729" sldId="2228"/>
+            <ac:spMk id="4" creationId="{002A1276-CB43-3B82-292B-4E261643216B}"/>
+          </ac:spMkLst>
+        </pc:spChg>
+        <pc:spChg chg="add del mod">
+          <ac:chgData name="Elizalde, Sergio" userId="0f7c9ba4-51fe-43ab-9ac1-6d642c4cebdf" providerId="ADAL" clId="{0E5839DB-E1D4-495F-B2BC-A8FC450CA4BC}" dt="2026-04-27T20:14:50.549" v="460" actId="478"/>
+          <ac:spMkLst>
+            <pc:docMk/>
+            <pc:sldMk cId="2404323729" sldId="2228"/>
+            <ac:spMk id="9" creationId="{D1A7C097-B26D-4830-1617-2D43E6D67FD4}"/>
+          </ac:spMkLst>
+        </pc:spChg>
+        <pc:spChg chg="add">
+          <ac:chgData name="Elizalde, Sergio" userId="0f7c9ba4-51fe-43ab-9ac1-6d642c4cebdf" providerId="ADAL" clId="{0E5839DB-E1D4-495F-B2BC-A8FC450CA4BC}" dt="2026-04-27T20:14:52.124" v="462"/>
+          <ac:spMkLst>
+            <pc:docMk/>
+            <pc:sldMk cId="2404323729" sldId="2228"/>
+            <ac:spMk id="10" creationId="{A1A9E438-B0B4-D5D0-E9E3-538549C55FEF}"/>
+          </ac:spMkLst>
+        </pc:spChg>
         <pc:spChg chg="mod">
-          <ac:chgData name="Elizalde, Sergio" userId="0f7c9ba4-51fe-43ab-9ac1-6d642c4cebdf" providerId="ADAL" clId="{0E5839DB-E1D4-495F-B2BC-A8FC450CA4BC}" dt="2026-04-26T22:51:14.763" v="82" actId="14100"/>
+          <ac:chgData name="Elizalde, Sergio" userId="0f7c9ba4-51fe-43ab-9ac1-6d642c4cebdf" providerId="ADAL" clId="{0E5839DB-E1D4-495F-B2BC-A8FC450CA4BC}" dt="2026-04-27T19:28:47.205" v="230" actId="403"/>
           <ac:spMkLst>
             <pc:docMk/>
             <pc:sldMk cId="2404323729" sldId="2228"/>
             <ac:spMk id="14" creationId="{EC3B4E82-9934-58A4-6CB6-C73055CD79E5}"/>
           </ac:spMkLst>
         </pc:spChg>
-        <pc:picChg chg="mod">
-          <ac:chgData name="Elizalde, Sergio" userId="0f7c9ba4-51fe-43ab-9ac1-6d642c4cebdf" providerId="ADAL" clId="{0E5839DB-E1D4-495F-B2BC-A8FC450CA4BC}" dt="2026-04-26T22:50:06.252" v="60" actId="1076"/>
+        <pc:picChg chg="del mod">
+          <ac:chgData name="Elizalde, Sergio" userId="0f7c9ba4-51fe-43ab-9ac1-6d642c4cebdf" providerId="ADAL" clId="{0E5839DB-E1D4-495F-B2BC-A8FC450CA4BC}" dt="2026-04-27T20:11:04.683" v="419" actId="478"/>
           <ac:picMkLst>
             <pc:docMk/>
             <pc:sldMk cId="2404323729" sldId="2228"/>
             <ac:picMk id="6" creationId="{0CDA4D58-9307-9F54-2F9D-AAA21955BB36}"/>
           </ac:picMkLst>
         </pc:picChg>
-        <pc:picChg chg="mod">
-          <ac:chgData name="Elizalde, Sergio" userId="0f7c9ba4-51fe-43ab-9ac1-6d642c4cebdf" providerId="ADAL" clId="{0E5839DB-E1D4-495F-B2BC-A8FC450CA4BC}" dt="2026-04-26T22:50:06.252" v="60" actId="1076"/>
+        <pc:picChg chg="add del mod">
+          <ac:chgData name="Elizalde, Sergio" userId="0f7c9ba4-51fe-43ab-9ac1-6d642c4cebdf" providerId="ADAL" clId="{0E5839DB-E1D4-495F-B2BC-A8FC450CA4BC}" dt="2026-04-27T20:14:51.123" v="461" actId="478"/>
+          <ac:picMkLst>
+            <pc:docMk/>
+            <pc:sldMk cId="2404323729" sldId="2228"/>
+            <ac:picMk id="8" creationId="{77F2C00D-14F8-C3A5-F5C2-4331637F6026}"/>
+          </ac:picMkLst>
+        </pc:picChg>
+        <pc:picChg chg="del mod">
+          <ac:chgData name="Elizalde, Sergio" userId="0f7c9ba4-51fe-43ab-9ac1-6d642c4cebdf" providerId="ADAL" clId="{0E5839DB-E1D4-495F-B2BC-A8FC450CA4BC}" dt="2026-04-27T20:11:04.341" v="418" actId="478"/>
           <ac:picMkLst>
             <pc:docMk/>
             <pc:sldMk cId="2404323729" sldId="2228"/>
             <ac:picMk id="11" creationId="{98D3ACB4-777D-7241-B168-D48F9ABCFFFC}"/>
           </ac:picMkLst>
         </pc:picChg>
+        <pc:picChg chg="add mod">
+          <ac:chgData name="Elizalde, Sergio" userId="0f7c9ba4-51fe-43ab-9ac1-6d642c4cebdf" providerId="ADAL" clId="{0E5839DB-E1D4-495F-B2BC-A8FC450CA4BC}" dt="2026-04-27T20:15:33.176" v="471" actId="1076"/>
+          <ac:picMkLst>
+            <pc:docMk/>
+            <pc:sldMk cId="2404323729" sldId="2228"/>
+            <ac:picMk id="13" creationId="{FB0A6563-42E9-743E-5D37-FF4F3999D096}"/>
+          </ac:picMkLst>
+        </pc:picChg>
+        <pc:picChg chg="add del mod">
+          <ac:chgData name="Elizalde, Sergio" userId="0f7c9ba4-51fe-43ab-9ac1-6d642c4cebdf" providerId="ADAL" clId="{0E5839DB-E1D4-495F-B2BC-A8FC450CA4BC}" dt="2026-04-27T20:11:14.447" v="423" actId="478"/>
+          <ac:picMkLst>
+            <pc:docMk/>
+            <pc:sldMk cId="2404323729" sldId="2228"/>
+            <ac:picMk id="1026" creationId="{621DD7FF-F3BA-03AA-3977-6229C66D43C3}"/>
+          </ac:picMkLst>
+        </pc:picChg>
+      </pc:sldChg>
+      <pc:sldChg chg="add">
+        <pc:chgData name="Elizalde, Sergio" userId="0f7c9ba4-51fe-43ab-9ac1-6d642c4cebdf" providerId="ADAL" clId="{0E5839DB-E1D4-495F-B2BC-A8FC450CA4BC}" dt="2026-04-27T20:11:02.256" v="417" actId="2890"/>
+        <pc:sldMkLst>
+          <pc:docMk/>
+          <pc:sldMk cId="3466206113" sldId="2229"/>
+        </pc:sldMkLst>
       </pc:sldChg>
     </pc:docChg>
   </pc:docChgLst>
@@ -940,7 +1084,7 @@
           <a:p>
             <a:fld id="{C7467944-E7CD-4CBF-B52C-CFDA3DC45EC0}" type="datetimeFigureOut">
               <a:rPr lang="en-US" smtClean="0"/>
-              <a:t>4/26/2026</a:t>
+              <a:t>4/27/2026</a:t>
             </a:fld>
             <a:endParaRPr lang="en-US"/>
           </a:p>
@@ -1117,7 +1261,7 @@
           <a:p>
             <a:fld id="{6590682D-FD54-284A-B7C8-2FCD4798133C}" type="datetimeFigureOut">
               <a:rPr lang="en-US" smtClean="0"/>
-              <a:t>4/26/2026</a:t>
+              <a:t>4/27/2026</a:t>
             </a:fld>
             <a:endParaRPr lang="en-US"/>
           </a:p>
@@ -1854,7 +1998,25 @@
           <a:bodyPr/>
           <a:lstStyle/>
           <a:p>
+            <a:r>
+              <a:rPr lang="en-US" sz="1000" b="0"/>
+              <a:t>RF 400 estimators, MLP 64,32 and SVM radial basis function</a:t>
+            </a:r>
+          </a:p>
+          <a:p>
             <a:endParaRPr lang="en-US" sz="1000" b="0"/>
+          </a:p>
+          <a:p>
+            <a:r>
+              <a:rPr lang="en-US" sz="1000" b="0"/>
+              <a:t>RNN</a:t>
+            </a:r>
+          </a:p>
+          <a:p>
+            <a:r>
+              <a:rPr lang="en-US" sz="1000" b="0"/>
+              <a:t>ACC 98%, PREC 98.9, Recall 98.5, MCC 97% and AUC 99</a:t>
+            </a:r>
           </a:p>
         </p:txBody>
       </p:sp>
@@ -2048,31 +2210,31 @@
           <a:p>
             <a:r>
               <a:rPr lang="en-US" sz="1000" b="0"/>
-              <a:t>ACC= 0.98</a:t>
+              <a:t>ACC= 0.96</a:t>
             </a:r>
           </a:p>
           <a:p>
             <a:r>
               <a:rPr lang="en-US" sz="1000" b="0"/>
-              <a:t>Prec. = 98.89</a:t>
+              <a:t>Prec. = 98.98</a:t>
             </a:r>
           </a:p>
           <a:p>
             <a:r>
               <a:rPr lang="en-US" sz="1000" b="0"/>
-              <a:t>F1=98.55</a:t>
+              <a:t>Recall = 95.38</a:t>
             </a:r>
           </a:p>
           <a:p>
             <a:r>
               <a:rPr lang="en-US" sz="1000" b="0"/>
-              <a:t>MCC= 96%</a:t>
+              <a:t>F1=97.14</a:t>
             </a:r>
           </a:p>
           <a:p>
             <a:r>
               <a:rPr lang="en-US" sz="1000" b="0"/>
-              <a:t>AUC= 99.83</a:t>
+              <a:t>MCC= 94%</a:t>
             </a:r>
           </a:p>
         </p:txBody>
@@ -2110,6 +2272,276 @@
     <p:extLst>
       <p:ext uri="{BB962C8B-B14F-4D97-AF65-F5344CB8AC3E}">
         <p14:creationId xmlns:p14="http://schemas.microsoft.com/office/powerpoint/2010/main" val="792597625"/>
+      </p:ext>
+    </p:extLst>
+  </p:cSld>
+  <p:clrMapOvr>
+    <a:masterClrMapping/>
+  </p:clrMapOvr>
+</p:notes>
+</file>
+
+<file path=ppt/notesSlides/notesSlide8.xml><?xml version="1.0" encoding="utf-8"?>
+<p:notes xmlns:a="http://schemas.openxmlformats.org/drawingml/2006/main" xmlns:r="http://schemas.openxmlformats.org/officeDocument/2006/relationships" xmlns:p="http://schemas.openxmlformats.org/presentationml/2006/main">
+  <p:cSld>
+    <p:spTree>
+      <p:nvGrpSpPr>
+        <p:cNvPr id="1" name="">
+          <a:extLst>
+            <a:ext uri="{FF2B5EF4-FFF2-40B4-BE49-F238E27FC236}">
+              <a16:creationId xmlns:a16="http://schemas.microsoft.com/office/drawing/2014/main" id="{9224C085-02DE-0DFB-F5E8-8D2D0BCD5899}"/>
+            </a:ext>
+          </a:extLst>
+        </p:cNvPr>
+        <p:cNvGrpSpPr/>
+        <p:nvPr/>
+      </p:nvGrpSpPr>
+      <p:grpSpPr>
+        <a:xfrm>
+          <a:off x="0" y="0"/>
+          <a:ext cx="0" cy="0"/>
+          <a:chOff x="0" y="0"/>
+          <a:chExt cx="0" cy="0"/>
+        </a:xfrm>
+      </p:grpSpPr>
+      <p:sp>
+        <p:nvSpPr>
+          <p:cNvPr id="2" name="Slide Image Placeholder 1">
+            <a:extLst>
+              <a:ext uri="{FF2B5EF4-FFF2-40B4-BE49-F238E27FC236}">
+                <a16:creationId xmlns:a16="http://schemas.microsoft.com/office/drawing/2014/main" id="{91948AEB-92C8-FEF9-2204-3026D3CFB9CF}"/>
+              </a:ext>
+            </a:extLst>
+          </p:cNvPr>
+          <p:cNvSpPr>
+            <a:spLocks noGrp="1" noRot="1" noChangeAspect="1"/>
+          </p:cNvSpPr>
+          <p:nvPr>
+            <p:ph type="sldImg"/>
+          </p:nvPr>
+        </p:nvSpPr>
+        <p:spPr/>
+      </p:sp>
+      <p:sp>
+        <p:nvSpPr>
+          <p:cNvPr id="3" name="Notes Placeholder 2">
+            <a:extLst>
+              <a:ext uri="{FF2B5EF4-FFF2-40B4-BE49-F238E27FC236}">
+                <a16:creationId xmlns:a16="http://schemas.microsoft.com/office/drawing/2014/main" id="{FA5DCAB7-B545-3BBA-311A-6E977F8BEDBB}"/>
+              </a:ext>
+            </a:extLst>
+          </p:cNvPr>
+          <p:cNvSpPr>
+            <a:spLocks noGrp="1"/>
+          </p:cNvSpPr>
+          <p:nvPr>
+            <p:ph type="body" idx="1"/>
+          </p:nvPr>
+        </p:nvSpPr>
+        <p:spPr/>
+        <p:txBody>
+          <a:bodyPr/>
+          <a:lstStyle/>
+          <a:p>
+            <a:r>
+              <a:rPr lang="en-US" sz="1000" b="0"/>
+              <a:t>ACC= 0.96</a:t>
+            </a:r>
+          </a:p>
+          <a:p>
+            <a:r>
+              <a:rPr lang="en-US" sz="1000" b="0"/>
+              <a:t>Prec. = 98.98</a:t>
+            </a:r>
+          </a:p>
+          <a:p>
+            <a:r>
+              <a:rPr lang="en-US" sz="1000" b="0"/>
+              <a:t>Recall = 95.38</a:t>
+            </a:r>
+          </a:p>
+          <a:p>
+            <a:r>
+              <a:rPr lang="en-US" sz="1000" b="0"/>
+              <a:t>F1=97.14</a:t>
+            </a:r>
+          </a:p>
+          <a:p>
+            <a:r>
+              <a:rPr lang="en-US" sz="1000" b="0"/>
+              <a:t>MCC= 94%</a:t>
+            </a:r>
+          </a:p>
+        </p:txBody>
+      </p:sp>
+      <p:sp>
+        <p:nvSpPr>
+          <p:cNvPr id="4" name="Slide Number Placeholder 3">
+            <a:extLst>
+              <a:ext uri="{FF2B5EF4-FFF2-40B4-BE49-F238E27FC236}">
+                <a16:creationId xmlns:a16="http://schemas.microsoft.com/office/drawing/2014/main" id="{31F1E4DA-1038-22D1-6C7C-8D72DCE179A5}"/>
+              </a:ext>
+            </a:extLst>
+          </p:cNvPr>
+          <p:cNvSpPr>
+            <a:spLocks noGrp="1"/>
+          </p:cNvSpPr>
+          <p:nvPr>
+            <p:ph type="sldNum" sz="quarter" idx="5"/>
+          </p:nvPr>
+        </p:nvSpPr>
+        <p:spPr/>
+        <p:txBody>
+          <a:bodyPr/>
+          <a:lstStyle/>
+          <a:p>
+            <a:fld id="{8CAF9C84-074E-E141-A3FD-46DE87E4CC01}" type="slidenum">
+              <a:rPr lang="en-US" smtClean="0"/>
+              <a:t>9</a:t>
+            </a:fld>
+            <a:endParaRPr lang="en-US"/>
+          </a:p>
+        </p:txBody>
+      </p:sp>
+    </p:spTree>
+    <p:extLst>
+      <p:ext uri="{BB962C8B-B14F-4D97-AF65-F5344CB8AC3E}">
+        <p14:creationId xmlns:p14="http://schemas.microsoft.com/office/powerpoint/2010/main" val="253750391"/>
+      </p:ext>
+    </p:extLst>
+  </p:cSld>
+  <p:clrMapOvr>
+    <a:masterClrMapping/>
+  </p:clrMapOvr>
+</p:notes>
+</file>
+
+<file path=ppt/notesSlides/notesSlide9.xml><?xml version="1.0" encoding="utf-8"?>
+<p:notes xmlns:a="http://schemas.openxmlformats.org/drawingml/2006/main" xmlns:r="http://schemas.openxmlformats.org/officeDocument/2006/relationships" xmlns:p="http://schemas.openxmlformats.org/presentationml/2006/main">
+  <p:cSld>
+    <p:spTree>
+      <p:nvGrpSpPr>
+        <p:cNvPr id="1" name="">
+          <a:extLst>
+            <a:ext uri="{FF2B5EF4-FFF2-40B4-BE49-F238E27FC236}">
+              <a16:creationId xmlns:a16="http://schemas.microsoft.com/office/drawing/2014/main" id="{3894D6A4-9EC2-4C23-3D82-44169E036A2F}"/>
+            </a:ext>
+          </a:extLst>
+        </p:cNvPr>
+        <p:cNvGrpSpPr/>
+        <p:nvPr/>
+      </p:nvGrpSpPr>
+      <p:grpSpPr>
+        <a:xfrm>
+          <a:off x="0" y="0"/>
+          <a:ext cx="0" cy="0"/>
+          <a:chOff x="0" y="0"/>
+          <a:chExt cx="0" cy="0"/>
+        </a:xfrm>
+      </p:grpSpPr>
+      <p:sp>
+        <p:nvSpPr>
+          <p:cNvPr id="2" name="Slide Image Placeholder 1">
+            <a:extLst>
+              <a:ext uri="{FF2B5EF4-FFF2-40B4-BE49-F238E27FC236}">
+                <a16:creationId xmlns:a16="http://schemas.microsoft.com/office/drawing/2014/main" id="{C3F320AA-9CCB-BAC1-D240-6C26A602BA7B}"/>
+              </a:ext>
+            </a:extLst>
+          </p:cNvPr>
+          <p:cNvSpPr>
+            <a:spLocks noGrp="1" noRot="1" noChangeAspect="1"/>
+          </p:cNvSpPr>
+          <p:nvPr>
+            <p:ph type="sldImg"/>
+          </p:nvPr>
+        </p:nvSpPr>
+        <p:spPr/>
+      </p:sp>
+      <p:sp>
+        <p:nvSpPr>
+          <p:cNvPr id="3" name="Notes Placeholder 2">
+            <a:extLst>
+              <a:ext uri="{FF2B5EF4-FFF2-40B4-BE49-F238E27FC236}">
+                <a16:creationId xmlns:a16="http://schemas.microsoft.com/office/drawing/2014/main" id="{DD84BBA2-D084-FD01-392B-7C164FF078BE}"/>
+              </a:ext>
+            </a:extLst>
+          </p:cNvPr>
+          <p:cNvSpPr>
+            <a:spLocks noGrp="1"/>
+          </p:cNvSpPr>
+          <p:nvPr>
+            <p:ph type="body" idx="1"/>
+          </p:nvPr>
+        </p:nvSpPr>
+        <p:spPr/>
+        <p:txBody>
+          <a:bodyPr/>
+          <a:lstStyle/>
+          <a:p>
+            <a:r>
+              <a:rPr lang="en-US" sz="1000" b="0"/>
+              <a:t>ACC= 0.96</a:t>
+            </a:r>
+          </a:p>
+          <a:p>
+            <a:r>
+              <a:rPr lang="en-US" sz="1000" b="0"/>
+              <a:t>Prec. = 98.98</a:t>
+            </a:r>
+          </a:p>
+          <a:p>
+            <a:r>
+              <a:rPr lang="en-US" sz="1000" b="0"/>
+              <a:t>Recall = 95.38</a:t>
+            </a:r>
+          </a:p>
+          <a:p>
+            <a:r>
+              <a:rPr lang="en-US" sz="1000" b="0"/>
+              <a:t>F1=97.14</a:t>
+            </a:r>
+          </a:p>
+          <a:p>
+            <a:r>
+              <a:rPr lang="en-US" sz="1000" b="0"/>
+              <a:t>MCC= 94%</a:t>
+            </a:r>
+          </a:p>
+        </p:txBody>
+      </p:sp>
+      <p:sp>
+        <p:nvSpPr>
+          <p:cNvPr id="4" name="Slide Number Placeholder 3">
+            <a:extLst>
+              <a:ext uri="{FF2B5EF4-FFF2-40B4-BE49-F238E27FC236}">
+                <a16:creationId xmlns:a16="http://schemas.microsoft.com/office/drawing/2014/main" id="{42A868E3-45A2-47C1-2645-BCEABB9FDEDF}"/>
+              </a:ext>
+            </a:extLst>
+          </p:cNvPr>
+          <p:cNvSpPr>
+            <a:spLocks noGrp="1"/>
+          </p:cNvSpPr>
+          <p:nvPr>
+            <p:ph type="sldNum" sz="quarter" idx="5"/>
+          </p:nvPr>
+        </p:nvSpPr>
+        <p:spPr/>
+        <p:txBody>
+          <a:bodyPr/>
+          <a:lstStyle/>
+          <a:p>
+            <a:fld id="{8CAF9C84-074E-E141-A3FD-46DE87E4CC01}" type="slidenum">
+              <a:rPr lang="en-US" smtClean="0"/>
+              <a:t>10</a:t>
+            </a:fld>
+            <a:endParaRPr lang="en-US"/>
+          </a:p>
+        </p:txBody>
+      </p:sp>
+    </p:spTree>
+    <p:extLst>
+      <p:ext uri="{BB962C8B-B14F-4D97-AF65-F5344CB8AC3E}">
+        <p14:creationId xmlns:p14="http://schemas.microsoft.com/office/powerpoint/2010/main" val="3849956085"/>
       </p:ext>
     </p:extLst>
   </p:cSld>
@@ -3258,6 +3690,692 @@
 </p:sld>
 </file>
 
+<file path=ppt/slides/slide10.xml><?xml version="1.0" encoding="utf-8"?>
+<p:sld xmlns:a="http://schemas.openxmlformats.org/drawingml/2006/main" xmlns:r="http://schemas.openxmlformats.org/officeDocument/2006/relationships" xmlns:p="http://schemas.openxmlformats.org/presentationml/2006/main">
+  <p:cSld>
+    <p:spTree>
+      <p:nvGrpSpPr>
+        <p:cNvPr id="1" name="">
+          <a:extLst>
+            <a:ext uri="{FF2B5EF4-FFF2-40B4-BE49-F238E27FC236}">
+              <a16:creationId xmlns:a16="http://schemas.microsoft.com/office/drawing/2014/main" id="{24D15E54-9C6F-ED94-E6BC-DD442996D22A}"/>
+            </a:ext>
+          </a:extLst>
+        </p:cNvPr>
+        <p:cNvGrpSpPr/>
+        <p:nvPr/>
+      </p:nvGrpSpPr>
+      <p:grpSpPr>
+        <a:xfrm>
+          <a:off x="0" y="0"/>
+          <a:ext cx="0" cy="0"/>
+          <a:chOff x="0" y="0"/>
+          <a:chExt cx="0" cy="0"/>
+        </a:xfrm>
+      </p:grpSpPr>
+      <p:sp>
+        <p:nvSpPr>
+          <p:cNvPr id="2" name="Title 1">
+            <a:extLst>
+              <a:ext uri="{FF2B5EF4-FFF2-40B4-BE49-F238E27FC236}">
+                <a16:creationId xmlns:a16="http://schemas.microsoft.com/office/drawing/2014/main" id="{49F1587F-9CC6-D8CB-E2AB-9BF0A73E3DBF}"/>
+              </a:ext>
+            </a:extLst>
+          </p:cNvPr>
+          <p:cNvSpPr>
+            <a:spLocks noGrp="1"/>
+          </p:cNvSpPr>
+          <p:nvPr>
+            <p:ph type="title"/>
+          </p:nvPr>
+        </p:nvSpPr>
+        <p:spPr/>
+        <p:txBody>
+          <a:bodyPr>
+            <a:normAutofit/>
+          </a:bodyPr>
+          <a:lstStyle/>
+          <a:p>
+            <a:r>
+              <a:rPr lang="en-US"/>
+              <a:t>Summary of results</a:t>
+            </a:r>
+          </a:p>
+        </p:txBody>
+      </p:sp>
+      <p:cxnSp>
+        <p:nvCxnSpPr>
+          <p:cNvPr id="5" name="Straight Connector 4">
+            <a:extLst>
+              <a:ext uri="{FF2B5EF4-FFF2-40B4-BE49-F238E27FC236}">
+                <a16:creationId xmlns:a16="http://schemas.microsoft.com/office/drawing/2014/main" id="{0156EE39-5590-A863-44FD-735457D86097}"/>
+              </a:ext>
+            </a:extLst>
+          </p:cNvPr>
+          <p:cNvCxnSpPr>
+            <a:cxnSpLocks/>
+          </p:cNvCxnSpPr>
+          <p:nvPr/>
+        </p:nvCxnSpPr>
+        <p:spPr>
+          <a:xfrm>
+            <a:off x="597551" y="876302"/>
+            <a:ext cx="5165296" cy="0"/>
+          </a:xfrm>
+          <a:prstGeom prst="line">
+            <a:avLst/>
+          </a:prstGeom>
+          <a:noFill/>
+          <a:ln w="25400" cap="flat" cmpd="sng" algn="ctr">
+            <a:solidFill>
+              <a:schemeClr val="accent2"/>
+            </a:solidFill>
+            <a:prstDash val="solid"/>
+          </a:ln>
+          <a:effectLst>
+            <a:outerShdw blurRad="40000" dist="20000" dir="5400000" rotWithShape="0">
+              <a:srgbClr val="000000">
+                <a:alpha val="38000"/>
+              </a:srgbClr>
+            </a:outerShdw>
+          </a:effectLst>
+        </p:spPr>
+      </p:cxnSp>
+      <p:sp>
+        <p:nvSpPr>
+          <p:cNvPr id="14" name="Content Placeholder 2">
+            <a:extLst>
+              <a:ext uri="{FF2B5EF4-FFF2-40B4-BE49-F238E27FC236}">
+                <a16:creationId xmlns:a16="http://schemas.microsoft.com/office/drawing/2014/main" id="{0AF9BA4E-F6D3-1AFF-AC68-0B490DEE53E6}"/>
+              </a:ext>
+            </a:extLst>
+          </p:cNvPr>
+          <p:cNvSpPr txBox="1">
+            <a:spLocks/>
+          </p:cNvSpPr>
+          <p:nvPr/>
+        </p:nvSpPr>
+        <p:spPr>
+          <a:xfrm>
+            <a:off x="366632" y="1141983"/>
+            <a:ext cx="11458736" cy="1613196"/>
+          </a:xfrm>
+          <a:prstGeom prst="rect">
+            <a:avLst/>
+          </a:prstGeom>
+        </p:spPr>
+        <p:txBody>
+          <a:bodyPr vert="horz" lIns="0" tIns="45720" rIns="0" bIns="45720" rtlCol="0">
+            <a:normAutofit/>
+          </a:bodyPr>
+          <a:lstStyle>
+            <a:lvl1pPr marL="91440" indent="-91440" algn="just" defTabSz="914400" rtl="0" eaLnBrk="1" latinLnBrk="0" hangingPunct="1">
+              <a:lnSpc>
+                <a:spcPct val="100000"/>
+              </a:lnSpc>
+              <a:spcBef>
+                <a:spcPts val="300"/>
+              </a:spcBef>
+              <a:spcAft>
+                <a:spcPts val="300"/>
+              </a:spcAft>
+              <a:buClr>
+                <a:schemeClr val="accent1"/>
+              </a:buClr>
+              <a:buSzPct val="100000"/>
+              <a:buFont typeface="Calibri" panose="020F0502020204030204" pitchFamily="34" charset="0"/>
+              <a:buChar char=" "/>
+              <a:defRPr sz="2200" kern="1200">
+                <a:solidFill>
+                  <a:schemeClr val="tx1">
+                    <a:lumMod val="75000"/>
+                    <a:lumOff val="25000"/>
+                  </a:schemeClr>
+                </a:solidFill>
+                <a:latin typeface="Arial" panose="020B0604020202020204" pitchFamily="34" charset="0"/>
+                <a:ea typeface="+mn-ea"/>
+                <a:cs typeface="Arial" panose="020B0604020202020204" pitchFamily="34" charset="0"/>
+              </a:defRPr>
+            </a:lvl1pPr>
+            <a:lvl2pPr marL="384048" indent="-182880" algn="just" defTabSz="914400" rtl="0" eaLnBrk="1" latinLnBrk="0" hangingPunct="1">
+              <a:lnSpc>
+                <a:spcPct val="90000"/>
+              </a:lnSpc>
+              <a:spcBef>
+                <a:spcPts val="200"/>
+              </a:spcBef>
+              <a:spcAft>
+                <a:spcPts val="200"/>
+              </a:spcAft>
+              <a:buClr>
+                <a:schemeClr val="accent1"/>
+              </a:buClr>
+              <a:buFont typeface="Calibri" pitchFamily="34" charset="0"/>
+              <a:buChar char="◦"/>
+              <a:defRPr sz="1800" kern="1200">
+                <a:solidFill>
+                  <a:schemeClr val="tx1">
+                    <a:lumMod val="75000"/>
+                    <a:lumOff val="25000"/>
+                  </a:schemeClr>
+                </a:solidFill>
+                <a:latin typeface="Arial" panose="020B0604020202020204" pitchFamily="34" charset="0"/>
+                <a:ea typeface="+mn-ea"/>
+                <a:cs typeface="Arial" panose="020B0604020202020204" pitchFamily="34" charset="0"/>
+              </a:defRPr>
+            </a:lvl2pPr>
+            <a:lvl3pPr marL="566928" indent="-182880" algn="just" defTabSz="914400" rtl="0" eaLnBrk="1" latinLnBrk="0" hangingPunct="1">
+              <a:lnSpc>
+                <a:spcPct val="90000"/>
+              </a:lnSpc>
+              <a:spcBef>
+                <a:spcPts val="200"/>
+              </a:spcBef>
+              <a:spcAft>
+                <a:spcPts val="200"/>
+              </a:spcAft>
+              <a:buClr>
+                <a:schemeClr val="accent1"/>
+              </a:buClr>
+              <a:buFont typeface="Calibri" pitchFamily="34" charset="0"/>
+              <a:buChar char="◦"/>
+              <a:defRPr sz="1400" kern="1200">
+                <a:solidFill>
+                  <a:schemeClr val="tx1">
+                    <a:lumMod val="75000"/>
+                    <a:lumOff val="25000"/>
+                  </a:schemeClr>
+                </a:solidFill>
+                <a:latin typeface="+mn-lt"/>
+                <a:ea typeface="+mn-ea"/>
+                <a:cs typeface="+mn-cs"/>
+              </a:defRPr>
+            </a:lvl3pPr>
+            <a:lvl4pPr marL="749808" indent="-182880" algn="just" defTabSz="914400" rtl="0" eaLnBrk="1" latinLnBrk="0" hangingPunct="1">
+              <a:lnSpc>
+                <a:spcPct val="90000"/>
+              </a:lnSpc>
+              <a:spcBef>
+                <a:spcPts val="200"/>
+              </a:spcBef>
+              <a:spcAft>
+                <a:spcPts val="200"/>
+              </a:spcAft>
+              <a:buClr>
+                <a:schemeClr val="accent1"/>
+              </a:buClr>
+              <a:buFont typeface="Calibri" pitchFamily="34" charset="0"/>
+              <a:buChar char="◦"/>
+              <a:defRPr sz="1200" kern="1200">
+                <a:solidFill>
+                  <a:schemeClr val="tx1">
+                    <a:lumMod val="75000"/>
+                    <a:lumOff val="25000"/>
+                  </a:schemeClr>
+                </a:solidFill>
+                <a:latin typeface="Arial" panose="020B0604020202020204" pitchFamily="34" charset="0"/>
+                <a:ea typeface="+mn-ea"/>
+                <a:cs typeface="Arial" panose="020B0604020202020204" pitchFamily="34" charset="0"/>
+              </a:defRPr>
+            </a:lvl4pPr>
+            <a:lvl5pPr marL="932688" indent="-182880" algn="just" defTabSz="914400" rtl="0" eaLnBrk="1" latinLnBrk="0" hangingPunct="1">
+              <a:lnSpc>
+                <a:spcPct val="90000"/>
+              </a:lnSpc>
+              <a:spcBef>
+                <a:spcPts val="200"/>
+              </a:spcBef>
+              <a:spcAft>
+                <a:spcPts val="200"/>
+              </a:spcAft>
+              <a:buClr>
+                <a:schemeClr val="accent1"/>
+              </a:buClr>
+              <a:buFont typeface="Calibri" pitchFamily="34" charset="0"/>
+              <a:buChar char="◦"/>
+              <a:defRPr sz="1000" kern="1200">
+                <a:solidFill>
+                  <a:schemeClr val="tx1">
+                    <a:lumMod val="75000"/>
+                    <a:lumOff val="25000"/>
+                  </a:schemeClr>
+                </a:solidFill>
+                <a:latin typeface="Arial" panose="020B0604020202020204" pitchFamily="34" charset="0"/>
+                <a:ea typeface="+mn-ea"/>
+                <a:cs typeface="Arial" panose="020B0604020202020204" pitchFamily="34" charset="0"/>
+              </a:defRPr>
+            </a:lvl5pPr>
+            <a:lvl6pPr marL="1100000" indent="-228600" algn="l" defTabSz="914400" rtl="0" eaLnBrk="1" latinLnBrk="0" hangingPunct="1">
+              <a:lnSpc>
+                <a:spcPct val="90000"/>
+              </a:lnSpc>
+              <a:spcBef>
+                <a:spcPts val="200"/>
+              </a:spcBef>
+              <a:spcAft>
+                <a:spcPts val="400"/>
+              </a:spcAft>
+              <a:buClr>
+                <a:schemeClr val="accent1"/>
+              </a:buClr>
+              <a:buFont typeface="Calibri" pitchFamily="34" charset="0"/>
+              <a:buChar char="◦"/>
+              <a:defRPr sz="1400" kern="1200">
+                <a:solidFill>
+                  <a:schemeClr val="tx1">
+                    <a:lumMod val="75000"/>
+                    <a:lumOff val="25000"/>
+                  </a:schemeClr>
+                </a:solidFill>
+                <a:latin typeface="+mn-lt"/>
+                <a:ea typeface="+mn-ea"/>
+                <a:cs typeface="+mn-cs"/>
+              </a:defRPr>
+            </a:lvl6pPr>
+            <a:lvl7pPr marL="1300000" indent="-228600" algn="l" defTabSz="914400" rtl="0" eaLnBrk="1" latinLnBrk="0" hangingPunct="1">
+              <a:lnSpc>
+                <a:spcPct val="90000"/>
+              </a:lnSpc>
+              <a:spcBef>
+                <a:spcPts val="200"/>
+              </a:spcBef>
+              <a:spcAft>
+                <a:spcPts val="400"/>
+              </a:spcAft>
+              <a:buClr>
+                <a:schemeClr val="accent1"/>
+              </a:buClr>
+              <a:buFont typeface="Calibri" pitchFamily="34" charset="0"/>
+              <a:buChar char="◦"/>
+              <a:defRPr sz="1400" kern="1200">
+                <a:solidFill>
+                  <a:schemeClr val="tx1">
+                    <a:lumMod val="75000"/>
+                    <a:lumOff val="25000"/>
+                  </a:schemeClr>
+                </a:solidFill>
+                <a:latin typeface="+mn-lt"/>
+                <a:ea typeface="+mn-ea"/>
+                <a:cs typeface="+mn-cs"/>
+              </a:defRPr>
+            </a:lvl7pPr>
+            <a:lvl8pPr marL="1500000" indent="-228600" algn="l" defTabSz="914400" rtl="0" eaLnBrk="1" latinLnBrk="0" hangingPunct="1">
+              <a:lnSpc>
+                <a:spcPct val="90000"/>
+              </a:lnSpc>
+              <a:spcBef>
+                <a:spcPts val="200"/>
+              </a:spcBef>
+              <a:spcAft>
+                <a:spcPts val="400"/>
+              </a:spcAft>
+              <a:buClr>
+                <a:schemeClr val="accent1"/>
+              </a:buClr>
+              <a:buFont typeface="Calibri" pitchFamily="34" charset="0"/>
+              <a:buChar char="◦"/>
+              <a:defRPr sz="1400" kern="1200">
+                <a:solidFill>
+                  <a:schemeClr val="tx1">
+                    <a:lumMod val="75000"/>
+                    <a:lumOff val="25000"/>
+                  </a:schemeClr>
+                </a:solidFill>
+                <a:latin typeface="+mn-lt"/>
+                <a:ea typeface="+mn-ea"/>
+                <a:cs typeface="+mn-cs"/>
+              </a:defRPr>
+            </a:lvl8pPr>
+            <a:lvl9pPr marL="1700000" indent="-228600" algn="l" defTabSz="914400" rtl="0" eaLnBrk="1" latinLnBrk="0" hangingPunct="1">
+              <a:lnSpc>
+                <a:spcPct val="90000"/>
+              </a:lnSpc>
+              <a:spcBef>
+                <a:spcPts val="200"/>
+              </a:spcBef>
+              <a:spcAft>
+                <a:spcPts val="400"/>
+              </a:spcAft>
+              <a:buClr>
+                <a:schemeClr val="accent1"/>
+              </a:buClr>
+              <a:buFont typeface="Calibri" pitchFamily="34" charset="0"/>
+              <a:buChar char="◦"/>
+              <a:defRPr sz="1400" kern="1200">
+                <a:solidFill>
+                  <a:schemeClr val="tx1">
+                    <a:lumMod val="75000"/>
+                    <a:lumOff val="25000"/>
+                  </a:schemeClr>
+                </a:solidFill>
+                <a:latin typeface="+mn-lt"/>
+                <a:ea typeface="+mn-ea"/>
+                <a:cs typeface="+mn-cs"/>
+              </a:defRPr>
+            </a:lvl9pPr>
+          </a:lstStyle>
+          <a:p>
+            <a:pPr marL="280981" lvl="0" indent="-280981">
+              <a:spcBef>
+                <a:spcPts val="600"/>
+              </a:spcBef>
+              <a:spcAft>
+                <a:spcPts val="0"/>
+              </a:spcAft>
+              <a:buClr>
+                <a:srgbClr val="9B2D1F"/>
+              </a:buClr>
+              <a:buFont typeface="Arial" panose="020B0604020202020204" pitchFamily="34" charset="0"/>
+              <a:buChar char="•"/>
+              <a:defRPr/>
+            </a:pPr>
+            <a:r>
+              <a:rPr kumimoji="0" lang="en-US" sz="2000" b="0" i="0" u="none" strike="noStrike" kern="1200" cap="none" spc="0" normalizeH="0" baseline="0" noProof="0">
+                <a:ln>
+                  <a:noFill/>
+                </a:ln>
+                <a:solidFill>
+                  <a:prstClr val="black">
+                    <a:lumMod val="75000"/>
+                    <a:lumOff val="25000"/>
+                  </a:prstClr>
+                </a:solidFill>
+                <a:effectLst/>
+                <a:uLnTx/>
+                <a:uFillTx/>
+              </a:rPr>
+              <a:t>Ordered considering ML performance</a:t>
+            </a:r>
+          </a:p>
+        </p:txBody>
+      </p:sp>
+      <p:pic>
+        <p:nvPicPr>
+          <p:cNvPr id="4" name="Picture 3">
+            <a:extLst>
+              <a:ext uri="{FF2B5EF4-FFF2-40B4-BE49-F238E27FC236}">
+                <a16:creationId xmlns:a16="http://schemas.microsoft.com/office/drawing/2014/main" id="{5570FBA1-30A0-3E40-9A07-ED96CC118166}"/>
+              </a:ext>
+            </a:extLst>
+          </p:cNvPr>
+          <p:cNvPicPr>
+            <a:picLocks noChangeAspect="1"/>
+          </p:cNvPicPr>
+          <p:nvPr/>
+        </p:nvPicPr>
+        <p:blipFill>
+          <a:blip r:embed="rId3"/>
+          <a:stretch>
+            <a:fillRect/>
+          </a:stretch>
+        </p:blipFill>
+        <p:spPr>
+          <a:xfrm>
+            <a:off x="1138594" y="2532888"/>
+            <a:ext cx="9560883" cy="3622041"/>
+          </a:xfrm>
+          <a:prstGeom prst="rect">
+            <a:avLst/>
+          </a:prstGeom>
+        </p:spPr>
+      </p:pic>
+    </p:spTree>
+    <p:extLst>
+      <p:ext uri="{BB962C8B-B14F-4D97-AF65-F5344CB8AC3E}">
+        <p14:creationId xmlns:p14="http://schemas.microsoft.com/office/powerpoint/2010/main" val="1797784792"/>
+      </p:ext>
+    </p:extLst>
+  </p:cSld>
+  <p:clrMapOvr>
+    <a:masterClrMapping/>
+  </p:clrMapOvr>
+</p:sld>
+</file>
+
+<file path=ppt/slides/slide11.xml><?xml version="1.0" encoding="utf-8"?>
+<p:sld xmlns:a="http://schemas.openxmlformats.org/drawingml/2006/main" xmlns:r="http://schemas.openxmlformats.org/officeDocument/2006/relationships" xmlns:p="http://schemas.openxmlformats.org/presentationml/2006/main">
+  <p:cSld>
+    <p:bg>
+      <p:bgRef idx="1001">
+        <a:schemeClr val="bg1"/>
+      </p:bgRef>
+    </p:bg>
+    <p:spTree>
+      <p:nvGrpSpPr>
+        <p:cNvPr id="1" name=""/>
+        <p:cNvGrpSpPr/>
+        <p:nvPr/>
+      </p:nvGrpSpPr>
+      <p:grpSpPr>
+        <a:xfrm>
+          <a:off x="0" y="0"/>
+          <a:ext cx="0" cy="0"/>
+          <a:chOff x="0" y="0"/>
+          <a:chExt cx="0" cy="0"/>
+        </a:xfrm>
+      </p:grpSpPr>
+      <p:sp>
+        <p:nvSpPr>
+          <p:cNvPr id="8" name="Title 1">
+            <a:extLst>
+              <a:ext uri="{FF2B5EF4-FFF2-40B4-BE49-F238E27FC236}">
+                <a16:creationId xmlns:a16="http://schemas.microsoft.com/office/drawing/2014/main" id="{2AADC870-B31B-47A0-F936-A85E9225B6C7}"/>
+              </a:ext>
+            </a:extLst>
+          </p:cNvPr>
+          <p:cNvSpPr>
+            <a:spLocks noGrp="1"/>
+          </p:cNvSpPr>
+          <p:nvPr>
+            <p:ph type="title"/>
+          </p:nvPr>
+        </p:nvSpPr>
+        <p:spPr>
+          <a:xfrm>
+            <a:off x="603575" y="1"/>
+            <a:ext cx="10984850" cy="888999"/>
+          </a:xfrm>
+        </p:spPr>
+        <p:txBody>
+          <a:bodyPr/>
+          <a:lstStyle/>
+          <a:p>
+            <a:r>
+              <a:rPr lang="en-US"/>
+              <a:t>Conclusion</a:t>
+            </a:r>
+          </a:p>
+        </p:txBody>
+      </p:sp>
+      <p:sp>
+        <p:nvSpPr>
+          <p:cNvPr id="3" name="Content Placeholder 2">
+            <a:extLst>
+              <a:ext uri="{FF2B5EF4-FFF2-40B4-BE49-F238E27FC236}">
+                <a16:creationId xmlns:a16="http://schemas.microsoft.com/office/drawing/2014/main" id="{4BC348B2-A502-4478-977C-9683494609FC}"/>
+              </a:ext>
+            </a:extLst>
+          </p:cNvPr>
+          <p:cNvSpPr>
+            <a:spLocks noGrp="1"/>
+          </p:cNvSpPr>
+          <p:nvPr>
+            <p:ph idx="1"/>
+          </p:nvPr>
+        </p:nvSpPr>
+        <p:spPr>
+          <a:xfrm>
+            <a:off x="603574" y="1181100"/>
+            <a:ext cx="11182025" cy="5278683"/>
+          </a:xfrm>
+        </p:spPr>
+        <p:txBody>
+          <a:bodyPr>
+            <a:normAutofit/>
+          </a:bodyPr>
+          <a:lstStyle/>
+          <a:p>
+            <a:pPr marL="342900" indent="-342900">
+              <a:lnSpc>
+                <a:spcPct val="150000"/>
+              </a:lnSpc>
+              <a:buClr>
+                <a:schemeClr val="accent2"/>
+              </a:buClr>
+              <a:buFont typeface="Arial" panose="020B0604020202020204" pitchFamily="34" charset="0"/>
+              <a:buChar char="•"/>
+            </a:pPr>
+            <a:r>
+              <a:rPr lang="en-US"/>
+              <a:t>Unsupervised methods significantly underperform compared to supervised models, highlighting the importance of labeled data for accurate CPS attack detection.</a:t>
+            </a:r>
+          </a:p>
+          <a:p>
+            <a:pPr marL="342900" indent="-342900">
+              <a:lnSpc>
+                <a:spcPct val="150000"/>
+              </a:lnSpc>
+              <a:buClr>
+                <a:schemeClr val="accent2"/>
+              </a:buClr>
+              <a:buFont typeface="Arial" panose="020B0604020202020204" pitchFamily="34" charset="0"/>
+              <a:buChar char="•"/>
+            </a:pPr>
+            <a:r>
+              <a:rPr lang="en-US"/>
+              <a:t>Random Forest emerges as a strong baseline, offering high accuracy with minimal preprocessing and tuning requirements.</a:t>
+            </a:r>
+          </a:p>
+          <a:p>
+            <a:pPr marL="342900" indent="-342900">
+              <a:lnSpc>
+                <a:spcPct val="150000"/>
+              </a:lnSpc>
+              <a:buClr>
+                <a:schemeClr val="accent2"/>
+              </a:buClr>
+              <a:buFont typeface="Arial" panose="020B0604020202020204" pitchFamily="34" charset="0"/>
+              <a:buChar char="•"/>
+            </a:pPr>
+            <a:r>
+              <a:rPr lang="en-US"/>
+              <a:t>The RNN achieves the best overall performance, demonstrating the value of capturing temporal patterns in network traffic.</a:t>
+            </a:r>
+          </a:p>
+          <a:p>
+            <a:pPr marL="342900" indent="-342900">
+              <a:lnSpc>
+                <a:spcPct val="150000"/>
+              </a:lnSpc>
+              <a:buClr>
+                <a:schemeClr val="accent2"/>
+              </a:buClr>
+              <a:buFont typeface="Arial" panose="020B0604020202020204" pitchFamily="34" charset="0"/>
+              <a:buChar char="•"/>
+            </a:pPr>
+            <a:r>
+              <a:rPr lang="en-US"/>
+              <a:t>Reinforcement learning (DQN) outperforms MLP using the same number of neurons.</a:t>
+            </a:r>
+          </a:p>
+          <a:p>
+            <a:pPr marL="342900" indent="-342900">
+              <a:lnSpc>
+                <a:spcPct val="150000"/>
+              </a:lnSpc>
+              <a:buClr>
+                <a:schemeClr val="accent2"/>
+              </a:buClr>
+              <a:buFont typeface="Arial" panose="020B0604020202020204" pitchFamily="34" charset="0"/>
+              <a:buChar char="•"/>
+            </a:pPr>
+            <a:r>
+              <a:rPr lang="en-US"/>
+              <a:t>Future work will focus on cross-dataset generalization, multimodal data fusion, and real-time deployment in CPS environments.</a:t>
+            </a:r>
+          </a:p>
+        </p:txBody>
+      </p:sp>
+      <p:sp>
+        <p:nvSpPr>
+          <p:cNvPr id="2" name="Slide Number Placeholder 1">
+            <a:extLst>
+              <a:ext uri="{FF2B5EF4-FFF2-40B4-BE49-F238E27FC236}">
+                <a16:creationId xmlns:a16="http://schemas.microsoft.com/office/drawing/2014/main" id="{F06036AB-31AB-5EA8-3BBD-436D49E8F7E1}"/>
+              </a:ext>
+            </a:extLst>
+          </p:cNvPr>
+          <p:cNvSpPr>
+            <a:spLocks noGrp="1"/>
+          </p:cNvSpPr>
+          <p:nvPr>
+            <p:ph type="sldNum" sz="quarter" idx="12"/>
+          </p:nvPr>
+        </p:nvSpPr>
+        <p:spPr/>
+        <p:txBody>
+          <a:bodyPr/>
+          <a:lstStyle/>
+          <a:p>
+            <a:fld id="{38C60F48-EAB5-A54D-B834-7AA360F30939}" type="slidenum">
+              <a:rPr lang="en-US" smtClean="0"/>
+              <a:t>11</a:t>
+            </a:fld>
+            <a:endParaRPr lang="en-US"/>
+          </a:p>
+        </p:txBody>
+      </p:sp>
+      <p:cxnSp>
+        <p:nvCxnSpPr>
+          <p:cNvPr id="9" name="Straight Connector 8">
+            <a:extLst>
+              <a:ext uri="{FF2B5EF4-FFF2-40B4-BE49-F238E27FC236}">
+                <a16:creationId xmlns:a16="http://schemas.microsoft.com/office/drawing/2014/main" id="{2017BC7A-06BB-4046-B6F1-FFEB2B5E29DB}"/>
+              </a:ext>
+            </a:extLst>
+          </p:cNvPr>
+          <p:cNvCxnSpPr>
+            <a:cxnSpLocks/>
+          </p:cNvCxnSpPr>
+          <p:nvPr/>
+        </p:nvCxnSpPr>
+        <p:spPr>
+          <a:xfrm>
+            <a:off x="597549" y="876301"/>
+            <a:ext cx="2530662" cy="0"/>
+          </a:xfrm>
+          <a:prstGeom prst="line">
+            <a:avLst/>
+          </a:prstGeom>
+          <a:noFill/>
+          <a:ln w="25400" cap="flat" cmpd="sng" algn="ctr">
+            <a:solidFill>
+              <a:schemeClr val="accent2"/>
+            </a:solidFill>
+            <a:prstDash val="solid"/>
+          </a:ln>
+          <a:effectLst>
+            <a:outerShdw blurRad="40000" dist="20000" dir="5400000" rotWithShape="0">
+              <a:srgbClr val="000000">
+                <a:alpha val="38000"/>
+              </a:srgbClr>
+            </a:outerShdw>
+          </a:effectLst>
+        </p:spPr>
+      </p:cxnSp>
+    </p:spTree>
+    <p:extLst>
+      <p:ext uri="{BB962C8B-B14F-4D97-AF65-F5344CB8AC3E}">
+        <p14:creationId xmlns:p14="http://schemas.microsoft.com/office/powerpoint/2010/main" val="3480351626"/>
+      </p:ext>
+    </p:extLst>
+  </p:cSld>
+  <p:clrMapOvr>
+    <a:overrideClrMapping bg1="lt1" tx1="dk1" bg2="lt2" tx2="dk2" accent1="accent1" accent2="accent2" accent3="accent3" accent4="accent4" accent5="accent5" accent6="accent6" hlink="hlink" folHlink="folHlink"/>
+  </p:clrMapOvr>
+</p:sld>
+</file>
+
 <file path=ppt/slides/slide2.xml><?xml version="1.0" encoding="utf-8"?>
 <p:sld xmlns:a="http://schemas.openxmlformats.org/drawingml/2006/main" xmlns:r="http://schemas.openxmlformats.org/officeDocument/2006/relationships" xmlns:p="http://schemas.openxmlformats.org/presentationml/2006/main">
   <p:cSld>
@@ -5608,7 +6726,7 @@
         </p:spPr>
         <p:txBody>
           <a:bodyPr vert="horz" lIns="0" tIns="45720" rIns="0" bIns="45720" rtlCol="0">
-            <a:normAutofit fontScale="85000" lnSpcReduction="20000"/>
+            <a:normAutofit/>
           </a:bodyPr>
           <a:lstStyle>
             <a:lvl1pPr marL="91440" indent="-91440" algn="just" defTabSz="914400" rtl="0" eaLnBrk="1" latinLnBrk="0" hangingPunct="1">
@@ -5858,9 +6976,6 @@
           </a:lstStyle>
           <a:p>
             <a:pPr marL="280981" lvl="0" indent="-280981">
-              <a:lnSpc>
-                <a:spcPct val="150000"/>
-              </a:lnSpc>
               <a:spcBef>
                 <a:spcPts val="600"/>
               </a:spcBef>
@@ -5875,7 +6990,7 @@
               <a:defRPr/>
             </a:pPr>
             <a:r>
-              <a:rPr kumimoji="0" lang="en-US" sz="2200" b="0" i="0" u="none" strike="noStrike" kern="1200" cap="none" spc="0" normalizeH="0" baseline="0" noProof="0">
+              <a:rPr kumimoji="0" lang="en-US" sz="2000" b="0" i="0" u="none" strike="noStrike" kern="1200" cap="none" spc="0" normalizeH="0" baseline="0" noProof="0">
                 <a:ln>
                   <a:noFill/>
                 </a:ln>
@@ -5889,14 +7004,41 @@
                 <a:uLnTx/>
                 <a:uFillTx/>
               </a:rPr>
-              <a:t>Evaluated Random Forest (RF), SVM, and MLP.</a:t>
+              <a:t>Evaluated Random Forest (RF), SVM, MLP, and RNN.</a:t>
             </a:r>
           </a:p>
           <a:p>
             <a:pPr marL="280981" lvl="0" indent="-280981">
-              <a:lnSpc>
-                <a:spcPct val="150000"/>
-              </a:lnSpc>
+              <a:spcBef>
+                <a:spcPts val="600"/>
+              </a:spcBef>
+              <a:spcAft>
+                <a:spcPts val="0"/>
+              </a:spcAft>
+              <a:buClr>
+                <a:srgbClr val="9B2D1F"/>
+              </a:buClr>
+              <a:buFont typeface="Arial" panose="020B0604020202020204" pitchFamily="34" charset="0"/>
+              <a:buChar char="•"/>
+              <a:defRPr/>
+            </a:pPr>
+            <a:endParaRPr kumimoji="0" lang="en-US" sz="2000" b="0" i="0" u="none" strike="noStrike" kern="1200" cap="none" spc="0" normalizeH="0" baseline="0" noProof="0">
+              <a:ln>
+                <a:noFill/>
+              </a:ln>
+              <a:solidFill>
+                <a:prstClr val="black">
+                  <a:lumMod val="75000"/>
+                  <a:lumOff val="25000"/>
+                </a:prstClr>
+              </a:solidFill>
+              <a:effectLst/>
+              <a:uLnTx/>
+              <a:uFillTx/>
+            </a:endParaRPr>
+          </a:p>
+          <a:p>
+            <a:pPr marL="280981" lvl="0" indent="-280981">
               <a:spcBef>
                 <a:spcPts val="600"/>
               </a:spcBef>
@@ -5911,7 +7053,7 @@
               <a:defRPr/>
             </a:pPr>
             <a:r>
-              <a:rPr kumimoji="0" lang="en-US" sz="2200" b="0" i="0" u="none" strike="noStrike" kern="1200" cap="none" spc="0" normalizeH="0" baseline="0" noProof="0">
+              <a:rPr kumimoji="0" lang="en-US" sz="2000" b="0" i="0" u="none" strike="noStrike" kern="1200" cap="none" spc="0" normalizeH="0" baseline="0" noProof="0">
                 <a:ln>
                   <a:noFill/>
                 </a:ln>
@@ -5929,10 +7071,36 @@
             </a:r>
           </a:p>
           <a:p>
+            <a:pPr marL="0" lvl="0" indent="0">
+              <a:spcBef>
+                <a:spcPts val="600"/>
+              </a:spcBef>
+              <a:spcAft>
+                <a:spcPts val="0"/>
+              </a:spcAft>
+              <a:buClr>
+                <a:srgbClr val="9B2D1F"/>
+              </a:buClr>
+              <a:buNone/>
+              <a:defRPr/>
+            </a:pPr>
+            <a:endParaRPr kumimoji="0" lang="en-US" sz="2000" b="0" i="0" u="none" strike="noStrike" kern="1200" cap="none" spc="0" normalizeH="0" baseline="0" noProof="0">
+              <a:ln>
+                <a:noFill/>
+              </a:ln>
+              <a:solidFill>
+                <a:prstClr val="black">
+                  <a:lumMod val="75000"/>
+                  <a:lumOff val="25000"/>
+                </a:prstClr>
+              </a:solidFill>
+              <a:effectLst/>
+              <a:uLnTx/>
+              <a:uFillTx/>
+            </a:endParaRPr>
+          </a:p>
+          <a:p>
             <a:pPr marL="280981" lvl="0" indent="-280981">
-              <a:lnSpc>
-                <a:spcPct val="150000"/>
-              </a:lnSpc>
               <a:spcBef>
                 <a:spcPts val="600"/>
               </a:spcBef>
@@ -5947,7 +7115,7 @@
               <a:defRPr/>
             </a:pPr>
             <a:r>
-              <a:rPr kumimoji="0" lang="en-US" sz="2200" b="0" i="0" u="none" strike="noStrike" kern="1200" cap="none" spc="0" normalizeH="0" baseline="0" noProof="0">
+              <a:rPr kumimoji="0" lang="en-US" sz="2000" b="0" i="0" u="none" strike="noStrike" kern="1200" cap="none" spc="0" normalizeH="0" baseline="0" noProof="0">
                 <a:ln>
                   <a:noFill/>
                 </a:ln>
@@ -5965,10 +7133,36 @@
             </a:r>
           </a:p>
           <a:p>
+            <a:pPr marL="0" lvl="0" indent="0">
+              <a:spcBef>
+                <a:spcPts val="600"/>
+              </a:spcBef>
+              <a:spcAft>
+                <a:spcPts val="0"/>
+              </a:spcAft>
+              <a:buClr>
+                <a:srgbClr val="9B2D1F"/>
+              </a:buClr>
+              <a:buNone/>
+              <a:defRPr/>
+            </a:pPr>
+            <a:endParaRPr kumimoji="0" lang="en-US" sz="2000" b="0" i="0" u="none" strike="noStrike" kern="1200" cap="none" spc="0" normalizeH="0" baseline="0" noProof="0">
+              <a:ln>
+                <a:noFill/>
+              </a:ln>
+              <a:solidFill>
+                <a:prstClr val="black">
+                  <a:lumMod val="75000"/>
+                  <a:lumOff val="25000"/>
+                </a:prstClr>
+              </a:solidFill>
+              <a:effectLst/>
+              <a:uLnTx/>
+              <a:uFillTx/>
+            </a:endParaRPr>
+          </a:p>
+          <a:p>
             <a:pPr marL="280981" lvl="0" indent="-280981">
-              <a:lnSpc>
-                <a:spcPct val="150000"/>
-              </a:lnSpc>
               <a:spcBef>
                 <a:spcPts val="600"/>
               </a:spcBef>
@@ -5983,7 +7177,7 @@
               <a:defRPr/>
             </a:pPr>
             <a:r>
-              <a:rPr kumimoji="0" lang="en-US" sz="2200" b="0" i="0" u="none" strike="noStrike" kern="1200" cap="none" spc="0" normalizeH="0" baseline="0" noProof="0">
+              <a:rPr kumimoji="0" lang="en-US" sz="2000" b="0" i="0" u="none" strike="noStrike" kern="1200" cap="none" spc="0" normalizeH="0" baseline="0" noProof="0">
                 <a:ln>
                   <a:noFill/>
                 </a:ln>
@@ -5998,42 +7192,6 @@
                 <a:uFillTx/>
               </a:rPr>
               <a:t>RNN further improves performance by capturing temporal dependencies in traffic sequences.</a:t>
-            </a:r>
-          </a:p>
-          <a:p>
-            <a:pPr marL="280981" lvl="0" indent="-280981">
-              <a:lnSpc>
-                <a:spcPct val="150000"/>
-              </a:lnSpc>
-              <a:spcBef>
-                <a:spcPts val="600"/>
-              </a:spcBef>
-              <a:spcAft>
-                <a:spcPts val="0"/>
-              </a:spcAft>
-              <a:buClr>
-                <a:srgbClr val="9B2D1F"/>
-              </a:buClr>
-              <a:buFont typeface="Arial" panose="020B0604020202020204" pitchFamily="34" charset="0"/>
-              <a:buChar char="•"/>
-              <a:defRPr/>
-            </a:pPr>
-            <a:r>
-              <a:rPr kumimoji="0" lang="en-US" sz="2200" b="0" i="0" u="none" strike="noStrike" kern="1200" cap="none" spc="0" normalizeH="0" baseline="0" noProof="0">
-                <a:ln>
-                  <a:noFill/>
-                </a:ln>
-                <a:solidFill>
-                  <a:prstClr val="black">
-                    <a:lumMod val="75000"/>
-                    <a:lumOff val="25000"/>
-                  </a:prstClr>
-                </a:solidFill>
-                <a:effectLst/>
-                <a:uLnTx/>
-                <a:uFillTx/>
-              </a:rPr>
-              <a:t>Supervised learning overall provides the most accurate and reliable detection results.</a:t>
             </a:r>
           </a:p>
         </p:txBody>
@@ -6091,8 +7249,38 @@
         </p:blipFill>
         <p:spPr>
           <a:xfrm>
-            <a:off x="6881982" y="2143597"/>
-            <a:ext cx="5171350" cy="4455229"/>
+            <a:off x="7558643" y="93743"/>
+            <a:ext cx="3871357" cy="3335257"/>
+          </a:xfrm>
+          <a:prstGeom prst="rect">
+            <a:avLst/>
+          </a:prstGeom>
+        </p:spPr>
+      </p:pic>
+      <p:pic>
+        <p:nvPicPr>
+          <p:cNvPr id="4" name="Picture 3">
+            <a:extLst>
+              <a:ext uri="{FF2B5EF4-FFF2-40B4-BE49-F238E27FC236}">
+                <a16:creationId xmlns:a16="http://schemas.microsoft.com/office/drawing/2014/main" id="{E5D2EF0C-5BB5-0472-A260-72CF75625625}"/>
+              </a:ext>
+            </a:extLst>
+          </p:cNvPr>
+          <p:cNvPicPr>
+            <a:picLocks noChangeAspect="1"/>
+          </p:cNvPicPr>
+          <p:nvPr/>
+        </p:nvPicPr>
+        <p:blipFill>
+          <a:blip r:embed="rId5"/>
+          <a:stretch>
+            <a:fillRect/>
+          </a:stretch>
+        </p:blipFill>
+        <p:spPr>
+          <a:xfrm>
+            <a:off x="7333678" y="3477938"/>
+            <a:ext cx="4096322" cy="3248478"/>
           </a:xfrm>
           <a:prstGeom prst="rect">
             <a:avLst/>
@@ -6222,7 +7410,7 @@
         </p:spPr>
         <p:txBody>
           <a:bodyPr vert="horz" lIns="0" tIns="45720" rIns="0" bIns="45720" rtlCol="0">
-            <a:normAutofit/>
+            <a:normAutofit lnSpcReduction="10000"/>
           </a:bodyPr>
           <a:lstStyle>
             <a:lvl1pPr marL="91440" indent="-91440" algn="just" defTabSz="914400" rtl="0" eaLnBrk="1" latinLnBrk="0" hangingPunct="1">
@@ -6486,7 +7674,7 @@
               <a:defRPr/>
             </a:pPr>
             <a:r>
-              <a:rPr kumimoji="0" lang="en-US" sz="2200" b="0" i="0" u="none" strike="noStrike" kern="1200" cap="none" spc="0" normalizeH="0" baseline="0" noProof="0">
+              <a:rPr kumimoji="0" lang="en-US" sz="2000" b="0" i="0" u="none" strike="noStrike" kern="1200" cap="none" spc="0" normalizeH="0" baseline="0" noProof="0">
                 <a:ln>
                   <a:noFill/>
                 </a:ln>
@@ -6504,6 +7692,35 @@
             </a:r>
           </a:p>
           <a:p>
+            <a:pPr marL="0" lvl="0" indent="0">
+              <a:spcBef>
+                <a:spcPts val="600"/>
+              </a:spcBef>
+              <a:spcAft>
+                <a:spcPts val="0"/>
+              </a:spcAft>
+              <a:buClr>
+                <a:srgbClr val="9B2D1F"/>
+              </a:buClr>
+              <a:buNone/>
+              <a:defRPr/>
+            </a:pPr>
+            <a:endParaRPr kumimoji="0" lang="en-US" sz="2000" b="0" i="0" u="none" strike="noStrike" kern="1200" cap="none" spc="0" normalizeH="0" baseline="0" noProof="0">
+              <a:ln>
+                <a:noFill/>
+              </a:ln>
+              <a:solidFill>
+                <a:prstClr val="black">
+                  <a:lumMod val="75000"/>
+                  <a:lumOff val="25000"/>
+                </a:prstClr>
+              </a:solidFill>
+              <a:effectLst/>
+              <a:uLnTx/>
+              <a:uFillTx/>
+            </a:endParaRPr>
+          </a:p>
+          <a:p>
             <a:pPr marL="280981" lvl="0" indent="-280981">
               <a:spcBef>
                 <a:spcPts val="600"/>
@@ -6519,7 +7736,7 @@
               <a:defRPr/>
             </a:pPr>
             <a:r>
-              <a:rPr kumimoji="0" lang="en-US" sz="2200" b="0" i="0" u="none" strike="noStrike" kern="1200" cap="none" spc="0" normalizeH="0" baseline="0" noProof="0">
+              <a:rPr kumimoji="0" lang="en-US" sz="2000" b="0" i="0" u="none" strike="noStrike" kern="1200" cap="none" spc="0" normalizeH="0" baseline="0" noProof="0">
                 <a:ln>
                   <a:noFill/>
                 </a:ln>
@@ -6537,6 +7754,35 @@
             </a:r>
           </a:p>
           <a:p>
+            <a:pPr marL="0" lvl="0" indent="0">
+              <a:spcBef>
+                <a:spcPts val="600"/>
+              </a:spcBef>
+              <a:spcAft>
+                <a:spcPts val="0"/>
+              </a:spcAft>
+              <a:buClr>
+                <a:srgbClr val="9B2D1F"/>
+              </a:buClr>
+              <a:buNone/>
+              <a:defRPr/>
+            </a:pPr>
+            <a:endParaRPr kumimoji="0" lang="en-US" sz="2000" b="0" i="0" u="none" strike="noStrike" kern="1200" cap="none" spc="0" normalizeH="0" baseline="0" noProof="0">
+              <a:ln>
+                <a:noFill/>
+              </a:ln>
+              <a:solidFill>
+                <a:prstClr val="black">
+                  <a:lumMod val="75000"/>
+                  <a:lumOff val="25000"/>
+                </a:prstClr>
+              </a:solidFill>
+              <a:effectLst/>
+              <a:uLnTx/>
+              <a:uFillTx/>
+            </a:endParaRPr>
+          </a:p>
+          <a:p>
             <a:pPr marL="280981" lvl="0" indent="-280981">
               <a:spcBef>
                 <a:spcPts val="600"/>
@@ -6552,7 +7798,7 @@
               <a:defRPr/>
             </a:pPr>
             <a:r>
-              <a:rPr kumimoji="0" lang="en-US" sz="2200" b="0" i="0" u="none" strike="noStrike" kern="1200" cap="none" spc="0" normalizeH="0" baseline="0" noProof="0">
+              <a:rPr kumimoji="0" lang="en-US" sz="2000" b="0" i="0" u="none" strike="noStrike" kern="1200" cap="none" spc="0" normalizeH="0" baseline="0" noProof="0">
                 <a:ln>
                   <a:noFill/>
                 </a:ln>
@@ -6570,6 +7816,35 @@
             </a:r>
           </a:p>
           <a:p>
+            <a:pPr marL="0" lvl="0" indent="0">
+              <a:spcBef>
+                <a:spcPts val="600"/>
+              </a:spcBef>
+              <a:spcAft>
+                <a:spcPts val="0"/>
+              </a:spcAft>
+              <a:buClr>
+                <a:srgbClr val="9B2D1F"/>
+              </a:buClr>
+              <a:buNone/>
+              <a:defRPr/>
+            </a:pPr>
+            <a:endParaRPr kumimoji="0" lang="en-US" sz="2000" b="0" i="0" u="none" strike="noStrike" kern="1200" cap="none" spc="0" normalizeH="0" baseline="0" noProof="0">
+              <a:ln>
+                <a:noFill/>
+              </a:ln>
+              <a:solidFill>
+                <a:prstClr val="black">
+                  <a:lumMod val="75000"/>
+                  <a:lumOff val="25000"/>
+                </a:prstClr>
+              </a:solidFill>
+              <a:effectLst/>
+              <a:uLnTx/>
+              <a:uFillTx/>
+            </a:endParaRPr>
+          </a:p>
+          <a:p>
             <a:pPr marL="280981" lvl="0" indent="-280981">
               <a:spcBef>
                 <a:spcPts val="600"/>
@@ -6585,10 +7860,10 @@
               <a:defRPr/>
             </a:pPr>
             <a:r>
-              <a:rPr lang="en-US"/>
+              <a:rPr lang="en-US" sz="2000"/>
               <a:t>Highlights limitations of purely anomaly-based detection in realistic CPS environments.</a:t>
             </a:r>
-            <a:endParaRPr kumimoji="0" lang="en-US" sz="2200" b="0" i="0" u="none" strike="noStrike" kern="1200" cap="none" spc="0" normalizeH="0" baseline="0" noProof="0">
+            <a:endParaRPr kumimoji="0" lang="en-US" sz="2000" b="0" i="0" u="none" strike="noStrike" kern="1200" cap="none" spc="0" normalizeH="0" baseline="0" noProof="0">
               <a:ln>
                 <a:noFill/>
               </a:ln>
@@ -6658,7 +7933,7 @@
         </p:blipFill>
         <p:spPr>
           <a:xfrm>
-            <a:off x="597550" y="4685871"/>
+            <a:off x="597550" y="4906396"/>
             <a:ext cx="6498505" cy="1640502"/>
           </a:xfrm>
           <a:prstGeom prst="rect">
@@ -7177,10 +8452,518 @@
       </p:sp>
       <p:pic>
         <p:nvPicPr>
+          <p:cNvPr id="13" name="Picture 12">
+            <a:extLst>
+              <a:ext uri="{FF2B5EF4-FFF2-40B4-BE49-F238E27FC236}">
+                <a16:creationId xmlns:a16="http://schemas.microsoft.com/office/drawing/2014/main" id="{FB0A6563-42E9-743E-5D37-FF4F3999D096}"/>
+              </a:ext>
+            </a:extLst>
+          </p:cNvPr>
+          <p:cNvPicPr>
+            <a:picLocks noChangeAspect="1"/>
+          </p:cNvPicPr>
+          <p:nvPr/>
+        </p:nvPicPr>
+        <p:blipFill>
+          <a:blip r:embed="rId3"/>
+          <a:stretch>
+            <a:fillRect/>
+          </a:stretch>
+        </p:blipFill>
+        <p:spPr>
+          <a:xfrm>
+            <a:off x="1947473" y="2238375"/>
+            <a:ext cx="8297053" cy="4545257"/>
+          </a:xfrm>
+          <a:prstGeom prst="rect">
+            <a:avLst/>
+          </a:prstGeom>
+        </p:spPr>
+      </p:pic>
+    </p:spTree>
+    <p:extLst>
+      <p:ext uri="{BB962C8B-B14F-4D97-AF65-F5344CB8AC3E}">
+        <p14:creationId xmlns:p14="http://schemas.microsoft.com/office/powerpoint/2010/main" val="2404323729"/>
+      </p:ext>
+    </p:extLst>
+  </p:cSld>
+  <p:clrMapOvr>
+    <a:masterClrMapping/>
+  </p:clrMapOvr>
+</p:sld>
+</file>
+
+<file path=ppt/slides/slide9.xml><?xml version="1.0" encoding="utf-8"?>
+<p:sld xmlns:a="http://schemas.openxmlformats.org/drawingml/2006/main" xmlns:r="http://schemas.openxmlformats.org/officeDocument/2006/relationships" xmlns:p="http://schemas.openxmlformats.org/presentationml/2006/main">
+  <p:cSld>
+    <p:spTree>
+      <p:nvGrpSpPr>
+        <p:cNvPr id="1" name="">
+          <a:extLst>
+            <a:ext uri="{FF2B5EF4-FFF2-40B4-BE49-F238E27FC236}">
+              <a16:creationId xmlns:a16="http://schemas.microsoft.com/office/drawing/2014/main" id="{953D6CA3-1B7F-2A17-251D-D8C2E2D8198B}"/>
+            </a:ext>
+          </a:extLst>
+        </p:cNvPr>
+        <p:cNvGrpSpPr/>
+        <p:nvPr/>
+      </p:nvGrpSpPr>
+      <p:grpSpPr>
+        <a:xfrm>
+          <a:off x="0" y="0"/>
+          <a:ext cx="0" cy="0"/>
+          <a:chOff x="0" y="0"/>
+          <a:chExt cx="0" cy="0"/>
+        </a:xfrm>
+      </p:grpSpPr>
+      <p:sp>
+        <p:nvSpPr>
+          <p:cNvPr id="2" name="Title 1">
+            <a:extLst>
+              <a:ext uri="{FF2B5EF4-FFF2-40B4-BE49-F238E27FC236}">
+                <a16:creationId xmlns:a16="http://schemas.microsoft.com/office/drawing/2014/main" id="{4B2FF58E-D3C5-66FE-FFC1-09A6690DD205}"/>
+              </a:ext>
+            </a:extLst>
+          </p:cNvPr>
+          <p:cNvSpPr>
+            <a:spLocks noGrp="1"/>
+          </p:cNvSpPr>
+          <p:nvPr>
+            <p:ph type="title"/>
+          </p:nvPr>
+        </p:nvSpPr>
+        <p:spPr/>
+        <p:txBody>
+          <a:bodyPr>
+            <a:normAutofit/>
+          </a:bodyPr>
+          <a:lstStyle/>
+          <a:p>
+            <a:r>
+              <a:rPr lang="en-US"/>
+              <a:t>Reinforcement Learning</a:t>
+            </a:r>
+          </a:p>
+        </p:txBody>
+      </p:sp>
+      <p:cxnSp>
+        <p:nvCxnSpPr>
+          <p:cNvPr id="5" name="Straight Connector 4">
+            <a:extLst>
+              <a:ext uri="{FF2B5EF4-FFF2-40B4-BE49-F238E27FC236}">
+                <a16:creationId xmlns:a16="http://schemas.microsoft.com/office/drawing/2014/main" id="{DED4CA18-E14F-D056-B54E-4A849464C4B1}"/>
+              </a:ext>
+            </a:extLst>
+          </p:cNvPr>
+          <p:cNvCxnSpPr>
+            <a:cxnSpLocks/>
+          </p:cNvCxnSpPr>
+          <p:nvPr/>
+        </p:nvCxnSpPr>
+        <p:spPr>
+          <a:xfrm>
+            <a:off x="597551" y="876302"/>
+            <a:ext cx="5165296" cy="0"/>
+          </a:xfrm>
+          <a:prstGeom prst="line">
+            <a:avLst/>
+          </a:prstGeom>
+          <a:noFill/>
+          <a:ln w="25400" cap="flat" cmpd="sng" algn="ctr">
+            <a:solidFill>
+              <a:schemeClr val="accent2"/>
+            </a:solidFill>
+            <a:prstDash val="solid"/>
+          </a:ln>
+          <a:effectLst>
+            <a:outerShdw blurRad="40000" dist="20000" dir="5400000" rotWithShape="0">
+              <a:srgbClr val="000000">
+                <a:alpha val="38000"/>
+              </a:srgbClr>
+            </a:outerShdw>
+          </a:effectLst>
+        </p:spPr>
+      </p:cxnSp>
+      <p:sp>
+        <p:nvSpPr>
+          <p:cNvPr id="14" name="Content Placeholder 2">
+            <a:extLst>
+              <a:ext uri="{FF2B5EF4-FFF2-40B4-BE49-F238E27FC236}">
+                <a16:creationId xmlns:a16="http://schemas.microsoft.com/office/drawing/2014/main" id="{4A2A5ADB-F7B3-2316-E742-F38510D6E34F}"/>
+              </a:ext>
+            </a:extLst>
+          </p:cNvPr>
+          <p:cNvSpPr txBox="1">
+            <a:spLocks/>
+          </p:cNvSpPr>
+          <p:nvPr/>
+        </p:nvSpPr>
+        <p:spPr>
+          <a:xfrm>
+            <a:off x="366632" y="1141983"/>
+            <a:ext cx="11458736" cy="1613196"/>
+          </a:xfrm>
+          <a:prstGeom prst="rect">
+            <a:avLst/>
+          </a:prstGeom>
+        </p:spPr>
+        <p:txBody>
+          <a:bodyPr vert="horz" lIns="0" tIns="45720" rIns="0" bIns="45720" rtlCol="0">
+            <a:normAutofit fontScale="92500"/>
+          </a:bodyPr>
+          <a:lstStyle>
+            <a:lvl1pPr marL="91440" indent="-91440" algn="just" defTabSz="914400" rtl="0" eaLnBrk="1" latinLnBrk="0" hangingPunct="1">
+              <a:lnSpc>
+                <a:spcPct val="100000"/>
+              </a:lnSpc>
+              <a:spcBef>
+                <a:spcPts val="300"/>
+              </a:spcBef>
+              <a:spcAft>
+                <a:spcPts val="300"/>
+              </a:spcAft>
+              <a:buClr>
+                <a:schemeClr val="accent1"/>
+              </a:buClr>
+              <a:buSzPct val="100000"/>
+              <a:buFont typeface="Calibri" panose="020F0502020204030204" pitchFamily="34" charset="0"/>
+              <a:buChar char=" "/>
+              <a:defRPr sz="2200" kern="1200">
+                <a:solidFill>
+                  <a:schemeClr val="tx1">
+                    <a:lumMod val="75000"/>
+                    <a:lumOff val="25000"/>
+                  </a:schemeClr>
+                </a:solidFill>
+                <a:latin typeface="Arial" panose="020B0604020202020204" pitchFamily="34" charset="0"/>
+                <a:ea typeface="+mn-ea"/>
+                <a:cs typeface="Arial" panose="020B0604020202020204" pitchFamily="34" charset="0"/>
+              </a:defRPr>
+            </a:lvl1pPr>
+            <a:lvl2pPr marL="384048" indent="-182880" algn="just" defTabSz="914400" rtl="0" eaLnBrk="1" latinLnBrk="0" hangingPunct="1">
+              <a:lnSpc>
+                <a:spcPct val="90000"/>
+              </a:lnSpc>
+              <a:spcBef>
+                <a:spcPts val="200"/>
+              </a:spcBef>
+              <a:spcAft>
+                <a:spcPts val="200"/>
+              </a:spcAft>
+              <a:buClr>
+                <a:schemeClr val="accent1"/>
+              </a:buClr>
+              <a:buFont typeface="Calibri" pitchFamily="34" charset="0"/>
+              <a:buChar char="◦"/>
+              <a:defRPr sz="1800" kern="1200">
+                <a:solidFill>
+                  <a:schemeClr val="tx1">
+                    <a:lumMod val="75000"/>
+                    <a:lumOff val="25000"/>
+                  </a:schemeClr>
+                </a:solidFill>
+                <a:latin typeface="Arial" panose="020B0604020202020204" pitchFamily="34" charset="0"/>
+                <a:ea typeface="+mn-ea"/>
+                <a:cs typeface="Arial" panose="020B0604020202020204" pitchFamily="34" charset="0"/>
+              </a:defRPr>
+            </a:lvl2pPr>
+            <a:lvl3pPr marL="566928" indent="-182880" algn="just" defTabSz="914400" rtl="0" eaLnBrk="1" latinLnBrk="0" hangingPunct="1">
+              <a:lnSpc>
+                <a:spcPct val="90000"/>
+              </a:lnSpc>
+              <a:spcBef>
+                <a:spcPts val="200"/>
+              </a:spcBef>
+              <a:spcAft>
+                <a:spcPts val="200"/>
+              </a:spcAft>
+              <a:buClr>
+                <a:schemeClr val="accent1"/>
+              </a:buClr>
+              <a:buFont typeface="Calibri" pitchFamily="34" charset="0"/>
+              <a:buChar char="◦"/>
+              <a:defRPr sz="1400" kern="1200">
+                <a:solidFill>
+                  <a:schemeClr val="tx1">
+                    <a:lumMod val="75000"/>
+                    <a:lumOff val="25000"/>
+                  </a:schemeClr>
+                </a:solidFill>
+                <a:latin typeface="+mn-lt"/>
+                <a:ea typeface="+mn-ea"/>
+                <a:cs typeface="+mn-cs"/>
+              </a:defRPr>
+            </a:lvl3pPr>
+            <a:lvl4pPr marL="749808" indent="-182880" algn="just" defTabSz="914400" rtl="0" eaLnBrk="1" latinLnBrk="0" hangingPunct="1">
+              <a:lnSpc>
+                <a:spcPct val="90000"/>
+              </a:lnSpc>
+              <a:spcBef>
+                <a:spcPts val="200"/>
+              </a:spcBef>
+              <a:spcAft>
+                <a:spcPts val="200"/>
+              </a:spcAft>
+              <a:buClr>
+                <a:schemeClr val="accent1"/>
+              </a:buClr>
+              <a:buFont typeface="Calibri" pitchFamily="34" charset="0"/>
+              <a:buChar char="◦"/>
+              <a:defRPr sz="1200" kern="1200">
+                <a:solidFill>
+                  <a:schemeClr val="tx1">
+                    <a:lumMod val="75000"/>
+                    <a:lumOff val="25000"/>
+                  </a:schemeClr>
+                </a:solidFill>
+                <a:latin typeface="Arial" panose="020B0604020202020204" pitchFamily="34" charset="0"/>
+                <a:ea typeface="+mn-ea"/>
+                <a:cs typeface="Arial" panose="020B0604020202020204" pitchFamily="34" charset="0"/>
+              </a:defRPr>
+            </a:lvl4pPr>
+            <a:lvl5pPr marL="932688" indent="-182880" algn="just" defTabSz="914400" rtl="0" eaLnBrk="1" latinLnBrk="0" hangingPunct="1">
+              <a:lnSpc>
+                <a:spcPct val="90000"/>
+              </a:lnSpc>
+              <a:spcBef>
+                <a:spcPts val="200"/>
+              </a:spcBef>
+              <a:spcAft>
+                <a:spcPts val="200"/>
+              </a:spcAft>
+              <a:buClr>
+                <a:schemeClr val="accent1"/>
+              </a:buClr>
+              <a:buFont typeface="Calibri" pitchFamily="34" charset="0"/>
+              <a:buChar char="◦"/>
+              <a:defRPr sz="1000" kern="1200">
+                <a:solidFill>
+                  <a:schemeClr val="tx1">
+                    <a:lumMod val="75000"/>
+                    <a:lumOff val="25000"/>
+                  </a:schemeClr>
+                </a:solidFill>
+                <a:latin typeface="Arial" panose="020B0604020202020204" pitchFamily="34" charset="0"/>
+                <a:ea typeface="+mn-ea"/>
+                <a:cs typeface="Arial" panose="020B0604020202020204" pitchFamily="34" charset="0"/>
+              </a:defRPr>
+            </a:lvl5pPr>
+            <a:lvl6pPr marL="1100000" indent="-228600" algn="l" defTabSz="914400" rtl="0" eaLnBrk="1" latinLnBrk="0" hangingPunct="1">
+              <a:lnSpc>
+                <a:spcPct val="90000"/>
+              </a:lnSpc>
+              <a:spcBef>
+                <a:spcPts val="200"/>
+              </a:spcBef>
+              <a:spcAft>
+                <a:spcPts val="400"/>
+              </a:spcAft>
+              <a:buClr>
+                <a:schemeClr val="accent1"/>
+              </a:buClr>
+              <a:buFont typeface="Calibri" pitchFamily="34" charset="0"/>
+              <a:buChar char="◦"/>
+              <a:defRPr sz="1400" kern="1200">
+                <a:solidFill>
+                  <a:schemeClr val="tx1">
+                    <a:lumMod val="75000"/>
+                    <a:lumOff val="25000"/>
+                  </a:schemeClr>
+                </a:solidFill>
+                <a:latin typeface="+mn-lt"/>
+                <a:ea typeface="+mn-ea"/>
+                <a:cs typeface="+mn-cs"/>
+              </a:defRPr>
+            </a:lvl6pPr>
+            <a:lvl7pPr marL="1300000" indent="-228600" algn="l" defTabSz="914400" rtl="0" eaLnBrk="1" latinLnBrk="0" hangingPunct="1">
+              <a:lnSpc>
+                <a:spcPct val="90000"/>
+              </a:lnSpc>
+              <a:spcBef>
+                <a:spcPts val="200"/>
+              </a:spcBef>
+              <a:spcAft>
+                <a:spcPts val="400"/>
+              </a:spcAft>
+              <a:buClr>
+                <a:schemeClr val="accent1"/>
+              </a:buClr>
+              <a:buFont typeface="Calibri" pitchFamily="34" charset="0"/>
+              <a:buChar char="◦"/>
+              <a:defRPr sz="1400" kern="1200">
+                <a:solidFill>
+                  <a:schemeClr val="tx1">
+                    <a:lumMod val="75000"/>
+                    <a:lumOff val="25000"/>
+                  </a:schemeClr>
+                </a:solidFill>
+                <a:latin typeface="+mn-lt"/>
+                <a:ea typeface="+mn-ea"/>
+                <a:cs typeface="+mn-cs"/>
+              </a:defRPr>
+            </a:lvl7pPr>
+            <a:lvl8pPr marL="1500000" indent="-228600" algn="l" defTabSz="914400" rtl="0" eaLnBrk="1" latinLnBrk="0" hangingPunct="1">
+              <a:lnSpc>
+                <a:spcPct val="90000"/>
+              </a:lnSpc>
+              <a:spcBef>
+                <a:spcPts val="200"/>
+              </a:spcBef>
+              <a:spcAft>
+                <a:spcPts val="400"/>
+              </a:spcAft>
+              <a:buClr>
+                <a:schemeClr val="accent1"/>
+              </a:buClr>
+              <a:buFont typeface="Calibri" pitchFamily="34" charset="0"/>
+              <a:buChar char="◦"/>
+              <a:defRPr sz="1400" kern="1200">
+                <a:solidFill>
+                  <a:schemeClr val="tx1">
+                    <a:lumMod val="75000"/>
+                    <a:lumOff val="25000"/>
+                  </a:schemeClr>
+                </a:solidFill>
+                <a:latin typeface="+mn-lt"/>
+                <a:ea typeface="+mn-ea"/>
+                <a:cs typeface="+mn-cs"/>
+              </a:defRPr>
+            </a:lvl8pPr>
+            <a:lvl9pPr marL="1700000" indent="-228600" algn="l" defTabSz="914400" rtl="0" eaLnBrk="1" latinLnBrk="0" hangingPunct="1">
+              <a:lnSpc>
+                <a:spcPct val="90000"/>
+              </a:lnSpc>
+              <a:spcBef>
+                <a:spcPts val="200"/>
+              </a:spcBef>
+              <a:spcAft>
+                <a:spcPts val="400"/>
+              </a:spcAft>
+              <a:buClr>
+                <a:schemeClr val="accent1"/>
+              </a:buClr>
+              <a:buFont typeface="Calibri" pitchFamily="34" charset="0"/>
+              <a:buChar char="◦"/>
+              <a:defRPr sz="1400" kern="1200">
+                <a:solidFill>
+                  <a:schemeClr val="tx1">
+                    <a:lumMod val="75000"/>
+                    <a:lumOff val="25000"/>
+                  </a:schemeClr>
+                </a:solidFill>
+                <a:latin typeface="+mn-lt"/>
+                <a:ea typeface="+mn-ea"/>
+                <a:cs typeface="+mn-cs"/>
+              </a:defRPr>
+            </a:lvl9pPr>
+          </a:lstStyle>
+          <a:p>
+            <a:pPr marL="280981" lvl="0" indent="-280981">
+              <a:spcBef>
+                <a:spcPts val="600"/>
+              </a:spcBef>
+              <a:spcAft>
+                <a:spcPts val="0"/>
+              </a:spcAft>
+              <a:buClr>
+                <a:srgbClr val="9B2D1F"/>
+              </a:buClr>
+              <a:buFont typeface="Arial" panose="020B0604020202020204" pitchFamily="34" charset="0"/>
+              <a:buChar char="•"/>
+              <a:defRPr/>
+            </a:pPr>
+            <a:r>
+              <a:rPr kumimoji="0" lang="en-US" sz="2000" b="0" i="0" u="none" strike="noStrike" kern="1200" cap="none" spc="0" normalizeH="0" baseline="0" noProof="0">
+                <a:ln>
+                  <a:noFill/>
+                </a:ln>
+                <a:solidFill>
+                  <a:prstClr val="black">
+                    <a:lumMod val="75000"/>
+                    <a:lumOff val="25000"/>
+                  </a:prstClr>
+                </a:solidFill>
+                <a:effectLst/>
+                <a:uLnTx/>
+                <a:uFillTx/>
+              </a:rPr>
+              <a:t>Attack detection formulated as a sequential decision problem using a Deep Q-Network (DQN) agent.</a:t>
+            </a:r>
+          </a:p>
+          <a:p>
+            <a:pPr marL="280981" lvl="0" indent="-280981">
+              <a:spcBef>
+                <a:spcPts val="600"/>
+              </a:spcBef>
+              <a:spcAft>
+                <a:spcPts val="0"/>
+              </a:spcAft>
+              <a:buClr>
+                <a:srgbClr val="9B2D1F"/>
+              </a:buClr>
+              <a:buFont typeface="Arial" panose="020B0604020202020204" pitchFamily="34" charset="0"/>
+              <a:buChar char="•"/>
+              <a:defRPr/>
+            </a:pPr>
+            <a:r>
+              <a:rPr kumimoji="0" lang="en-US" sz="2000" b="0" i="0" u="none" strike="noStrike" kern="1200" cap="none" spc="0" normalizeH="0" baseline="0" noProof="0">
+                <a:ln>
+                  <a:noFill/>
+                </a:ln>
+                <a:solidFill>
+                  <a:prstClr val="black">
+                    <a:lumMod val="75000"/>
+                    <a:lumOff val="25000"/>
+                  </a:prstClr>
+                </a:solidFill>
+                <a:effectLst/>
+                <a:uLnTx/>
+                <a:uFillTx/>
+              </a:rPr>
+              <a:t>Agent learns to classify flows (benign vs. attack) through reward feedback (+1 correct, −1 incorrect).</a:t>
+            </a:r>
+          </a:p>
+          <a:p>
+            <a:pPr marL="280981" lvl="0" indent="-280981">
+              <a:spcBef>
+                <a:spcPts val="600"/>
+              </a:spcBef>
+              <a:spcAft>
+                <a:spcPts val="0"/>
+              </a:spcAft>
+              <a:buClr>
+                <a:srgbClr val="9B2D1F"/>
+              </a:buClr>
+              <a:buFont typeface="Arial" panose="020B0604020202020204" pitchFamily="34" charset="0"/>
+              <a:buChar char="•"/>
+              <a:defRPr/>
+            </a:pPr>
+            <a:r>
+              <a:rPr kumimoji="0" lang="en-US" sz="2000" b="0" i="0" u="none" strike="noStrike" kern="1200" cap="none" spc="0" normalizeH="0" baseline="0" noProof="0">
+                <a:ln>
+                  <a:noFill/>
+                </a:ln>
+                <a:solidFill>
+                  <a:prstClr val="black">
+                    <a:lumMod val="75000"/>
+                    <a:lumOff val="25000"/>
+                  </a:prstClr>
+                </a:solidFill>
+                <a:effectLst/>
+                <a:uLnTx/>
+                <a:uFillTx/>
+              </a:rPr>
+              <a:t>Training shows steady improvement, with episodic reward increasing significantly over time.</a:t>
+            </a:r>
+          </a:p>
+        </p:txBody>
+      </p:sp>
+      <p:pic>
+        <p:nvPicPr>
           <p:cNvPr id="6" name="Picture 5">
             <a:extLst>
               <a:ext uri="{FF2B5EF4-FFF2-40B4-BE49-F238E27FC236}">
-                <a16:creationId xmlns:a16="http://schemas.microsoft.com/office/drawing/2014/main" id="{0CDA4D58-9307-9F54-2F9D-AAA21955BB36}"/>
+                <a16:creationId xmlns:a16="http://schemas.microsoft.com/office/drawing/2014/main" id="{545898A8-53B8-DC67-CCE4-4F7534582EB9}"/>
               </a:ext>
             </a:extLst>
           </p:cNvPr>
@@ -7210,7 +8993,7 @@
           <p:cNvPr id="11" name="Picture 10">
             <a:extLst>
               <a:ext uri="{FF2B5EF4-FFF2-40B4-BE49-F238E27FC236}">
-                <a16:creationId xmlns:a16="http://schemas.microsoft.com/office/drawing/2014/main" id="{98D3ACB4-777D-7241-B168-D48F9ABCFFFC}"/>
+                <a16:creationId xmlns:a16="http://schemas.microsoft.com/office/drawing/2014/main" id="{7E1A8764-9064-B1A2-065E-98C7C20F2D5C}"/>
               </a:ext>
             </a:extLst>
           </p:cNvPr>
@@ -7239,256 +9022,12 @@
     </p:spTree>
     <p:extLst>
       <p:ext uri="{BB962C8B-B14F-4D97-AF65-F5344CB8AC3E}">
-        <p14:creationId xmlns:p14="http://schemas.microsoft.com/office/powerpoint/2010/main" val="2404323729"/>
+        <p14:creationId xmlns:p14="http://schemas.microsoft.com/office/powerpoint/2010/main" val="3466206113"/>
       </p:ext>
     </p:extLst>
   </p:cSld>
   <p:clrMapOvr>
     <a:masterClrMapping/>
-  </p:clrMapOvr>
-</p:sld>
-</file>
-
-<file path=ppt/slides/slide9.xml><?xml version="1.0" encoding="utf-8"?>
-<p:sld xmlns:a="http://schemas.openxmlformats.org/drawingml/2006/main" xmlns:r="http://schemas.openxmlformats.org/officeDocument/2006/relationships" xmlns:p="http://schemas.openxmlformats.org/presentationml/2006/main">
-  <p:cSld>
-    <p:bg>
-      <p:bgRef idx="1001">
-        <a:schemeClr val="bg1"/>
-      </p:bgRef>
-    </p:bg>
-    <p:spTree>
-      <p:nvGrpSpPr>
-        <p:cNvPr id="1" name=""/>
-        <p:cNvGrpSpPr/>
-        <p:nvPr/>
-      </p:nvGrpSpPr>
-      <p:grpSpPr>
-        <a:xfrm>
-          <a:off x="0" y="0"/>
-          <a:ext cx="0" cy="0"/>
-          <a:chOff x="0" y="0"/>
-          <a:chExt cx="0" cy="0"/>
-        </a:xfrm>
-      </p:grpSpPr>
-      <p:sp>
-        <p:nvSpPr>
-          <p:cNvPr id="8" name="Title 1">
-            <a:extLst>
-              <a:ext uri="{FF2B5EF4-FFF2-40B4-BE49-F238E27FC236}">
-                <a16:creationId xmlns:a16="http://schemas.microsoft.com/office/drawing/2014/main" id="{2AADC870-B31B-47A0-F936-A85E9225B6C7}"/>
-              </a:ext>
-            </a:extLst>
-          </p:cNvPr>
-          <p:cNvSpPr>
-            <a:spLocks noGrp="1"/>
-          </p:cNvSpPr>
-          <p:nvPr>
-            <p:ph type="title"/>
-          </p:nvPr>
-        </p:nvSpPr>
-        <p:spPr>
-          <a:xfrm>
-            <a:off x="603575" y="1"/>
-            <a:ext cx="10984850" cy="888999"/>
-          </a:xfrm>
-        </p:spPr>
-        <p:txBody>
-          <a:bodyPr/>
-          <a:lstStyle/>
-          <a:p>
-            <a:r>
-              <a:rPr lang="en-US"/>
-              <a:t>Conclusion</a:t>
-            </a:r>
-          </a:p>
-        </p:txBody>
-      </p:sp>
-      <p:sp>
-        <p:nvSpPr>
-          <p:cNvPr id="3" name="Content Placeholder 2">
-            <a:extLst>
-              <a:ext uri="{FF2B5EF4-FFF2-40B4-BE49-F238E27FC236}">
-                <a16:creationId xmlns:a16="http://schemas.microsoft.com/office/drawing/2014/main" id="{4BC348B2-A502-4478-977C-9683494609FC}"/>
-              </a:ext>
-            </a:extLst>
-          </p:cNvPr>
-          <p:cNvSpPr>
-            <a:spLocks noGrp="1"/>
-          </p:cNvSpPr>
-          <p:nvPr>
-            <p:ph idx="1"/>
-          </p:nvPr>
-        </p:nvSpPr>
-        <p:spPr>
-          <a:xfrm>
-            <a:off x="603574" y="1181100"/>
-            <a:ext cx="11182025" cy="5278683"/>
-          </a:xfrm>
-        </p:spPr>
-        <p:txBody>
-          <a:bodyPr>
-            <a:normAutofit lnSpcReduction="10000"/>
-          </a:bodyPr>
-          <a:lstStyle/>
-          <a:p>
-            <a:pPr marL="342900" indent="-342900">
-              <a:lnSpc>
-                <a:spcPct val="150000"/>
-              </a:lnSpc>
-              <a:buClr>
-                <a:schemeClr val="accent2"/>
-              </a:buClr>
-              <a:buFont typeface="Arial" panose="020B0604020202020204" pitchFamily="34" charset="0"/>
-              <a:buChar char="•"/>
-            </a:pPr>
-            <a:r>
-              <a:rPr lang="en-US"/>
-              <a:t>Unsupervised methods significantly underperform compared to supervised models, highlighting the importance of labeled data for accurate CPS attack detection.</a:t>
-            </a:r>
-          </a:p>
-          <a:p>
-            <a:pPr marL="342900" indent="-342900">
-              <a:lnSpc>
-                <a:spcPct val="150000"/>
-              </a:lnSpc>
-              <a:buClr>
-                <a:schemeClr val="accent2"/>
-              </a:buClr>
-              <a:buFont typeface="Arial" panose="020B0604020202020204" pitchFamily="34" charset="0"/>
-              <a:buChar char="•"/>
-            </a:pPr>
-            <a:r>
-              <a:rPr lang="en-US"/>
-              <a:t>Random Forest emerges as a strong baseline, offering high accuracy with minimal preprocessing and tuning requirements.</a:t>
-            </a:r>
-          </a:p>
-          <a:p>
-            <a:pPr marL="342900" indent="-342900">
-              <a:lnSpc>
-                <a:spcPct val="150000"/>
-              </a:lnSpc>
-              <a:buClr>
-                <a:schemeClr val="accent2"/>
-              </a:buClr>
-              <a:buFont typeface="Arial" panose="020B0604020202020204" pitchFamily="34" charset="0"/>
-              <a:buChar char="•"/>
-            </a:pPr>
-            <a:r>
-              <a:rPr lang="en-US"/>
-              <a:t>The RNN achieves the best overall performance, demonstrating the value of capturing temporal patterns in network traffic.</a:t>
-            </a:r>
-          </a:p>
-          <a:p>
-            <a:pPr marL="342900" indent="-342900">
-              <a:lnSpc>
-                <a:spcPct val="150000"/>
-              </a:lnSpc>
-              <a:buClr>
-                <a:schemeClr val="accent2"/>
-              </a:buClr>
-              <a:buFont typeface="Arial" panose="020B0604020202020204" pitchFamily="34" charset="0"/>
-              <a:buChar char="•"/>
-            </a:pPr>
-            <a:r>
-              <a:rPr lang="en-US"/>
-              <a:t>Reinforcement learning (DQN) shows promise, but requires more rigorous evaluation with proper test metrics.</a:t>
-            </a:r>
-          </a:p>
-          <a:p>
-            <a:pPr marL="342900" indent="-342900">
-              <a:lnSpc>
-                <a:spcPct val="150000"/>
-              </a:lnSpc>
-              <a:buClr>
-                <a:schemeClr val="accent2"/>
-              </a:buClr>
-              <a:buFont typeface="Arial" panose="020B0604020202020204" pitchFamily="34" charset="0"/>
-              <a:buChar char="•"/>
-            </a:pPr>
-            <a:r>
-              <a:rPr lang="en-US"/>
-              <a:t>Future work will focus on cross-dataset generalization, multimodal data fusion, and real-time deployment in CPS environments.</a:t>
-            </a:r>
-          </a:p>
-        </p:txBody>
-      </p:sp>
-      <p:sp>
-        <p:nvSpPr>
-          <p:cNvPr id="2" name="Slide Number Placeholder 1">
-            <a:extLst>
-              <a:ext uri="{FF2B5EF4-FFF2-40B4-BE49-F238E27FC236}">
-                <a16:creationId xmlns:a16="http://schemas.microsoft.com/office/drawing/2014/main" id="{F06036AB-31AB-5EA8-3BBD-436D49E8F7E1}"/>
-              </a:ext>
-            </a:extLst>
-          </p:cNvPr>
-          <p:cNvSpPr>
-            <a:spLocks noGrp="1"/>
-          </p:cNvSpPr>
-          <p:nvPr>
-            <p:ph type="sldNum" sz="quarter" idx="12"/>
-          </p:nvPr>
-        </p:nvSpPr>
-        <p:spPr/>
-        <p:txBody>
-          <a:bodyPr/>
-          <a:lstStyle/>
-          <a:p>
-            <a:fld id="{38C60F48-EAB5-A54D-B834-7AA360F30939}" type="slidenum">
-              <a:rPr lang="en-US" smtClean="0"/>
-              <a:t>9</a:t>
-            </a:fld>
-            <a:endParaRPr lang="en-US"/>
-          </a:p>
-        </p:txBody>
-      </p:sp>
-      <p:cxnSp>
-        <p:nvCxnSpPr>
-          <p:cNvPr id="9" name="Straight Connector 8">
-            <a:extLst>
-              <a:ext uri="{FF2B5EF4-FFF2-40B4-BE49-F238E27FC236}">
-                <a16:creationId xmlns:a16="http://schemas.microsoft.com/office/drawing/2014/main" id="{2017BC7A-06BB-4046-B6F1-FFEB2B5E29DB}"/>
-              </a:ext>
-            </a:extLst>
-          </p:cNvPr>
-          <p:cNvCxnSpPr>
-            <a:cxnSpLocks/>
-          </p:cNvCxnSpPr>
-          <p:nvPr/>
-        </p:nvCxnSpPr>
-        <p:spPr>
-          <a:xfrm>
-            <a:off x="597549" y="876301"/>
-            <a:ext cx="2530662" cy="0"/>
-          </a:xfrm>
-          <a:prstGeom prst="line">
-            <a:avLst/>
-          </a:prstGeom>
-          <a:noFill/>
-          <a:ln w="25400" cap="flat" cmpd="sng" algn="ctr">
-            <a:solidFill>
-              <a:schemeClr val="accent2"/>
-            </a:solidFill>
-            <a:prstDash val="solid"/>
-          </a:ln>
-          <a:effectLst>
-            <a:outerShdw blurRad="40000" dist="20000" dir="5400000" rotWithShape="0">
-              <a:srgbClr val="000000">
-                <a:alpha val="38000"/>
-              </a:srgbClr>
-            </a:outerShdw>
-          </a:effectLst>
-        </p:spPr>
-      </p:cxnSp>
-    </p:spTree>
-    <p:extLst>
-      <p:ext uri="{BB962C8B-B14F-4D97-AF65-F5344CB8AC3E}">
-        <p14:creationId xmlns:p14="http://schemas.microsoft.com/office/powerpoint/2010/main" val="3480351626"/>
-      </p:ext>
-    </p:extLst>
-  </p:cSld>
-  <p:clrMapOvr>
-    <a:overrideClrMapping bg1="lt1" tx1="dk1" bg2="lt2" tx2="dk2" accent1="accent1" accent2="accent2" accent3="accent3" accent4="accent4" accent5="accent5" accent6="accent6" hlink="hlink" folHlink="folHlink"/>
   </p:clrMapOvr>
 </p:sld>
 </file>
